--- a/05_descriptive_statistics_kpis/data_analysis_descriptive_statistics.pptx
+++ b/05_descriptive_statistics_kpis/data_analysis_descriptive_statistics.pptx
@@ -11,13 +11,13 @@
     <p:sldId id="261" r:id="rId2"/>
     <p:sldId id="264" r:id="rId3"/>
     <p:sldId id="260" r:id="rId4"/>
-    <p:sldId id="281" r:id="rId5"/>
-    <p:sldId id="286" r:id="rId6"/>
-    <p:sldId id="287" r:id="rId7"/>
-    <p:sldId id="282" r:id="rId8"/>
-    <p:sldId id="283" r:id="rId9"/>
-    <p:sldId id="285" r:id="rId10"/>
-    <p:sldId id="280" r:id="rId11"/>
+    <p:sldId id="288" r:id="rId5"/>
+    <p:sldId id="289" r:id="rId6"/>
+    <p:sldId id="290" r:id="rId7"/>
+    <p:sldId id="280" r:id="rId8"/>
+    <p:sldId id="291" r:id="rId9"/>
+    <p:sldId id="292" r:id="rId10"/>
+    <p:sldId id="293" r:id="rId11"/>
   </p:sldIdLst>
   <p:sldSz cx="12192000" cy="6858000"/>
   <p:notesSz cx="6858000" cy="9144000"/>
@@ -206,7 +206,7 @@
           <a:p>
             <a:fld id="{629EF45C-B4A1-4048-BF7F-D1617E8131EB}" type="datetimeFigureOut">
               <a:rPr lang="LID4096" smtClean="0"/>
-              <a:t>02/27/2026</a:t>
+              <a:t>03/03/2026</a:t>
             </a:fld>
             <a:endParaRPr lang="LID4096"/>
           </a:p>
@@ -566,7 +566,7 @@
         <p:cNvPr id="1" name="">
           <a:extLst>
             <a:ext uri="{FF2B5EF4-FFF2-40B4-BE49-F238E27FC236}">
-              <a16:creationId xmlns:a16="http://schemas.microsoft.com/office/drawing/2014/main" id="{5D5F4EF4-34F0-39CD-4990-B4FD238371A0}"/>
+              <a16:creationId xmlns:a16="http://schemas.microsoft.com/office/drawing/2014/main" id="{8AF04C33-F523-3D2F-11FA-57D6009394FD}"/>
             </a:ext>
           </a:extLst>
         </p:cNvPr>
@@ -586,7 +586,7 @@
           <p:cNvPr id="2" name="Slide Image Placeholder 1">
             <a:extLst>
               <a:ext uri="{FF2B5EF4-FFF2-40B4-BE49-F238E27FC236}">
-                <a16:creationId xmlns:a16="http://schemas.microsoft.com/office/drawing/2014/main" id="{AFC8D2A7-EF2A-ED76-48CA-D4E86D6C03B6}"/>
+                <a16:creationId xmlns:a16="http://schemas.microsoft.com/office/drawing/2014/main" id="{295D43A6-5F0B-1FDA-8912-801B81BF83BA}"/>
               </a:ext>
             </a:extLst>
           </p:cNvPr>
@@ -604,7 +604,7 @@
           <p:cNvPr id="3" name="Notes Placeholder 2">
             <a:extLst>
               <a:ext uri="{FF2B5EF4-FFF2-40B4-BE49-F238E27FC236}">
-                <a16:creationId xmlns:a16="http://schemas.microsoft.com/office/drawing/2014/main" id="{A9BB5485-83CD-4ADC-788C-3012DA67A603}"/>
+                <a16:creationId xmlns:a16="http://schemas.microsoft.com/office/drawing/2014/main" id="{1B946ACC-3BF8-E561-E07B-65074FB73CDC}"/>
               </a:ext>
             </a:extLst>
           </p:cNvPr>
@@ -633,7 +633,7 @@
           <p:cNvPr id="4" name="Slide Number Placeholder 3">
             <a:extLst>
               <a:ext uri="{FF2B5EF4-FFF2-40B4-BE49-F238E27FC236}">
-                <a16:creationId xmlns:a16="http://schemas.microsoft.com/office/drawing/2014/main" id="{59926DFF-682A-F89C-8456-81E256D8F327}"/>
+                <a16:creationId xmlns:a16="http://schemas.microsoft.com/office/drawing/2014/main" id="{3838E3E7-BC3D-C07D-AF16-5DC08856BF92}"/>
               </a:ext>
             </a:extLst>
           </p:cNvPr>
@@ -660,7 +660,7 @@
     </p:spTree>
     <p:extLst>
       <p:ext uri="{BB962C8B-B14F-4D97-AF65-F5344CB8AC3E}">
-        <p14:creationId xmlns:p14="http://schemas.microsoft.com/office/powerpoint/2010/main" val="2173139332"/>
+        <p14:creationId xmlns:p14="http://schemas.microsoft.com/office/powerpoint/2010/main" val="1665412447"/>
       </p:ext>
     </p:extLst>
   </p:cSld>
@@ -870,7 +870,7 @@
         <p:cNvPr id="1" name="">
           <a:extLst>
             <a:ext uri="{FF2B5EF4-FFF2-40B4-BE49-F238E27FC236}">
-              <a16:creationId xmlns:a16="http://schemas.microsoft.com/office/drawing/2014/main" id="{E9F6D6D0-D2F4-862D-CE1C-64128AFFB5EC}"/>
+              <a16:creationId xmlns:a16="http://schemas.microsoft.com/office/drawing/2014/main" id="{F221B3E4-3194-6E66-6287-AB7FF3BD427B}"/>
             </a:ext>
           </a:extLst>
         </p:cNvPr>
@@ -890,7 +890,7 @@
           <p:cNvPr id="2" name="Slide Image Placeholder 1">
             <a:extLst>
               <a:ext uri="{FF2B5EF4-FFF2-40B4-BE49-F238E27FC236}">
-                <a16:creationId xmlns:a16="http://schemas.microsoft.com/office/drawing/2014/main" id="{88CE2BB6-EEE0-863E-E6CB-0D1A4E53A094}"/>
+                <a16:creationId xmlns:a16="http://schemas.microsoft.com/office/drawing/2014/main" id="{C0A3F460-2035-9F1D-B8B7-60BB15FA6E72}"/>
               </a:ext>
             </a:extLst>
           </p:cNvPr>
@@ -908,7 +908,7 @@
           <p:cNvPr id="3" name="Notes Placeholder 2">
             <a:extLst>
               <a:ext uri="{FF2B5EF4-FFF2-40B4-BE49-F238E27FC236}">
-                <a16:creationId xmlns:a16="http://schemas.microsoft.com/office/drawing/2014/main" id="{96EECB26-72B7-0AD4-5DE8-18DAD3844416}"/>
+                <a16:creationId xmlns:a16="http://schemas.microsoft.com/office/drawing/2014/main" id="{6B736828-221E-1749-ABA4-4CE673D63D71}"/>
               </a:ext>
             </a:extLst>
           </p:cNvPr>
@@ -933,7 +933,7 @@
           <p:cNvPr id="4" name="Slide Number Placeholder 3">
             <a:extLst>
               <a:ext uri="{FF2B5EF4-FFF2-40B4-BE49-F238E27FC236}">
-                <a16:creationId xmlns:a16="http://schemas.microsoft.com/office/drawing/2014/main" id="{CAE2111E-8A84-158C-4D15-06469604BCA7}"/>
+                <a16:creationId xmlns:a16="http://schemas.microsoft.com/office/drawing/2014/main" id="{03EB3733-BEAC-8B81-3FDC-A04D30C330E2}"/>
               </a:ext>
             </a:extLst>
           </p:cNvPr>
@@ -960,7 +960,7 @@
     </p:spTree>
     <p:extLst>
       <p:ext uri="{BB962C8B-B14F-4D97-AF65-F5344CB8AC3E}">
-        <p14:creationId xmlns:p14="http://schemas.microsoft.com/office/powerpoint/2010/main" val="1370777400"/>
+        <p14:creationId xmlns:p14="http://schemas.microsoft.com/office/powerpoint/2010/main" val="3946132858"/>
       </p:ext>
     </p:extLst>
   </p:cSld>
@@ -978,7 +978,7 @@
         <p:cNvPr id="1" name="">
           <a:extLst>
             <a:ext uri="{FF2B5EF4-FFF2-40B4-BE49-F238E27FC236}">
-              <a16:creationId xmlns:a16="http://schemas.microsoft.com/office/drawing/2014/main" id="{EEF239BF-2618-C457-9D91-B606971DC6C5}"/>
+              <a16:creationId xmlns:a16="http://schemas.microsoft.com/office/drawing/2014/main" id="{3F630DEB-9B74-42E2-4380-9E14B787AB20}"/>
             </a:ext>
           </a:extLst>
         </p:cNvPr>
@@ -998,7 +998,7 @@
           <p:cNvPr id="2" name="Slide Image Placeholder 1">
             <a:extLst>
               <a:ext uri="{FF2B5EF4-FFF2-40B4-BE49-F238E27FC236}">
-                <a16:creationId xmlns:a16="http://schemas.microsoft.com/office/drawing/2014/main" id="{68BCDD7C-4CD5-D1F2-F637-5CFCD9745EF4}"/>
+                <a16:creationId xmlns:a16="http://schemas.microsoft.com/office/drawing/2014/main" id="{4F01452B-2426-2022-E4EC-518ECD4D5444}"/>
               </a:ext>
             </a:extLst>
           </p:cNvPr>
@@ -1016,7 +1016,7 @@
           <p:cNvPr id="3" name="Notes Placeholder 2">
             <a:extLst>
               <a:ext uri="{FF2B5EF4-FFF2-40B4-BE49-F238E27FC236}">
-                <a16:creationId xmlns:a16="http://schemas.microsoft.com/office/drawing/2014/main" id="{3DEC7755-71A2-87FB-1093-D33B3E019CE8}"/>
+                <a16:creationId xmlns:a16="http://schemas.microsoft.com/office/drawing/2014/main" id="{DD4006EC-AC4F-EC73-CC32-FA265D9AC456}"/>
               </a:ext>
             </a:extLst>
           </p:cNvPr>
@@ -1033,35 +1033,10 @@
           <a:lstStyle/>
           <a:p>
             <a:r>
-              <a:rPr lang="en-US" dirty="0"/>
-              <a:t>"A value X is more representative than Y if, when I randomly select one value from the dataset, and repeat this process multiple times, X on average deviates less from the dataset than Y.“</a:t>
-            </a:r>
-          </a:p>
-          <a:p>
-            <a:pPr marL="0" marR="0" lvl="0" indent="0" algn="l" defTabSz="914400" rtl="0" eaLnBrk="1" fontAlgn="auto" latinLnBrk="0" hangingPunct="1">
-              <a:lnSpc>
-                <a:spcPct val="100000"/>
-              </a:lnSpc>
-              <a:spcBef>
-                <a:spcPts val="0"/>
-              </a:spcBef>
-              <a:spcAft>
-                <a:spcPts val="0"/>
-              </a:spcAft>
-              <a:buClrTx/>
-              <a:buSzTx/>
-              <a:buFontTx/>
-              <a:buNone/>
-              <a:tabLst/>
-              <a:defRPr/>
-            </a:pPr>
-            <a:r>
-              <a:rPr lang="en-US" dirty="0"/>
-              <a:t>"X is more representative than Y if it is, on average, closer to the values of the dataset than Y when repeatedly sampling."</a:t>
-            </a:r>
-          </a:p>
-          <a:p>
-            <a:endParaRPr lang="en-US" dirty="0"/>
+              <a:rPr lang="de-DE" dirty="0"/>
+              <a:t>Bevor wir analysieren oder ein Model trainieren, müssen wir sicherstellen, dass unsere Daten verlässlich sind. Schlechte Daten führen automatisch zu schlechten Ergebnissen. Data Quality ist keine Option, sondern eine Voraussetzung.</a:t>
+            </a:r>
+            <a:endParaRPr lang="LID4096" dirty="0"/>
           </a:p>
         </p:txBody>
       </p:sp>
@@ -1070,7 +1045,7 @@
           <p:cNvPr id="4" name="Slide Number Placeholder 3">
             <a:extLst>
               <a:ext uri="{FF2B5EF4-FFF2-40B4-BE49-F238E27FC236}">
-                <a16:creationId xmlns:a16="http://schemas.microsoft.com/office/drawing/2014/main" id="{C01D188C-ED38-0FEB-8EBC-1B5D173A0289}"/>
+                <a16:creationId xmlns:a16="http://schemas.microsoft.com/office/drawing/2014/main" id="{A697F372-1AC8-9CE5-D59B-62A93331C936}"/>
               </a:ext>
             </a:extLst>
           </p:cNvPr>
@@ -1097,7 +1072,7 @@
     </p:spTree>
     <p:extLst>
       <p:ext uri="{BB962C8B-B14F-4D97-AF65-F5344CB8AC3E}">
-        <p14:creationId xmlns:p14="http://schemas.microsoft.com/office/powerpoint/2010/main" val="2963179260"/>
+        <p14:creationId xmlns:p14="http://schemas.microsoft.com/office/powerpoint/2010/main" val="3762737045"/>
       </p:ext>
     </p:extLst>
   </p:cSld>
@@ -1115,7 +1090,7 @@
         <p:cNvPr id="1" name="">
           <a:extLst>
             <a:ext uri="{FF2B5EF4-FFF2-40B4-BE49-F238E27FC236}">
-              <a16:creationId xmlns:a16="http://schemas.microsoft.com/office/drawing/2014/main" id="{13D77A8F-5EBC-A83E-A6D8-EF7917556AD9}"/>
+              <a16:creationId xmlns:a16="http://schemas.microsoft.com/office/drawing/2014/main" id="{587E1263-8A14-B09B-DD00-5B4DE30809E7}"/>
             </a:ext>
           </a:extLst>
         </p:cNvPr>
@@ -1135,7 +1110,7 @@
           <p:cNvPr id="2" name="Slide Image Placeholder 1">
             <a:extLst>
               <a:ext uri="{FF2B5EF4-FFF2-40B4-BE49-F238E27FC236}">
-                <a16:creationId xmlns:a16="http://schemas.microsoft.com/office/drawing/2014/main" id="{C3E7CBE3-4728-8CBF-3E0B-48C8B0428442}"/>
+                <a16:creationId xmlns:a16="http://schemas.microsoft.com/office/drawing/2014/main" id="{45D74628-D45A-FA91-7271-548060DE371B}"/>
               </a:ext>
             </a:extLst>
           </p:cNvPr>
@@ -1153,7 +1128,7 @@
           <p:cNvPr id="3" name="Notes Placeholder 2">
             <a:extLst>
               <a:ext uri="{FF2B5EF4-FFF2-40B4-BE49-F238E27FC236}">
-                <a16:creationId xmlns:a16="http://schemas.microsoft.com/office/drawing/2014/main" id="{F59EB670-0178-9DA6-79BE-8CC00C0CE26E}"/>
+                <a16:creationId xmlns:a16="http://schemas.microsoft.com/office/drawing/2014/main" id="{9ED84180-5077-B9A6-6350-D2FA186548FB}"/>
               </a:ext>
             </a:extLst>
           </p:cNvPr>
@@ -1170,35 +1145,10 @@
           <a:lstStyle/>
           <a:p>
             <a:r>
-              <a:rPr lang="en-US" dirty="0"/>
-              <a:t>"A value X is more representative than Y if, when I randomly select one value from the dataset, and repeat this process multiple times, X on average deviates less from the dataset than Y.“</a:t>
-            </a:r>
-          </a:p>
-          <a:p>
-            <a:pPr marL="0" marR="0" lvl="0" indent="0" algn="l" defTabSz="914400" rtl="0" eaLnBrk="1" fontAlgn="auto" latinLnBrk="0" hangingPunct="1">
-              <a:lnSpc>
-                <a:spcPct val="100000"/>
-              </a:lnSpc>
-              <a:spcBef>
-                <a:spcPts val="0"/>
-              </a:spcBef>
-              <a:spcAft>
-                <a:spcPts val="0"/>
-              </a:spcAft>
-              <a:buClrTx/>
-              <a:buSzTx/>
-              <a:buFontTx/>
-              <a:buNone/>
-              <a:tabLst/>
-              <a:defRPr/>
-            </a:pPr>
-            <a:r>
-              <a:rPr lang="en-US" dirty="0"/>
-              <a:t>"X is more representative than Y if it is, on average, closer to the values of the dataset than Y when repeatedly sampling."</a:t>
-            </a:r>
-          </a:p>
-          <a:p>
-            <a:endParaRPr lang="en-US" dirty="0"/>
+              <a:rPr lang="de-DE" dirty="0"/>
+              <a:t>Bevor wir analysieren oder ein Model trainieren, müssen wir sicherstellen, dass unsere Daten verlässlich sind. Schlechte Daten führen automatisch zu schlechten Ergebnissen. Data Quality ist keine Option, sondern eine Voraussetzung.</a:t>
+            </a:r>
+            <a:endParaRPr lang="LID4096" dirty="0"/>
           </a:p>
         </p:txBody>
       </p:sp>
@@ -1207,7 +1157,7 @@
           <p:cNvPr id="4" name="Slide Number Placeholder 3">
             <a:extLst>
               <a:ext uri="{FF2B5EF4-FFF2-40B4-BE49-F238E27FC236}">
-                <a16:creationId xmlns:a16="http://schemas.microsoft.com/office/drawing/2014/main" id="{5496D48F-F0DF-E283-23CA-188DA530870D}"/>
+                <a16:creationId xmlns:a16="http://schemas.microsoft.com/office/drawing/2014/main" id="{BA58732F-055E-A917-B8FB-1F3C7EE6ECC5}"/>
               </a:ext>
             </a:extLst>
           </p:cNvPr>
@@ -1234,7 +1184,7 @@
     </p:spTree>
     <p:extLst>
       <p:ext uri="{BB962C8B-B14F-4D97-AF65-F5344CB8AC3E}">
-        <p14:creationId xmlns:p14="http://schemas.microsoft.com/office/powerpoint/2010/main" val="1206462332"/>
+        <p14:creationId xmlns:p14="http://schemas.microsoft.com/office/powerpoint/2010/main" val="4123637595"/>
       </p:ext>
     </p:extLst>
   </p:cSld>
@@ -1252,7 +1202,7 @@
         <p:cNvPr id="1" name="">
           <a:extLst>
             <a:ext uri="{FF2B5EF4-FFF2-40B4-BE49-F238E27FC236}">
-              <a16:creationId xmlns:a16="http://schemas.microsoft.com/office/drawing/2014/main" id="{0686CFE4-C7AD-862F-7BC9-CC98AFF2AC5E}"/>
+              <a16:creationId xmlns:a16="http://schemas.microsoft.com/office/drawing/2014/main" id="{5D5F4EF4-34F0-39CD-4990-B4FD238371A0}"/>
             </a:ext>
           </a:extLst>
         </p:cNvPr>
@@ -1272,7 +1222,7 @@
           <p:cNvPr id="2" name="Slide Image Placeholder 1">
             <a:extLst>
               <a:ext uri="{FF2B5EF4-FFF2-40B4-BE49-F238E27FC236}">
-                <a16:creationId xmlns:a16="http://schemas.microsoft.com/office/drawing/2014/main" id="{E13C9B2E-ACFA-6B9C-BC2A-798900C3F293}"/>
+                <a16:creationId xmlns:a16="http://schemas.microsoft.com/office/drawing/2014/main" id="{AFC8D2A7-EF2A-ED76-48CA-D4E86D6C03B6}"/>
               </a:ext>
             </a:extLst>
           </p:cNvPr>
@@ -1290,7 +1240,7 @@
           <p:cNvPr id="3" name="Notes Placeholder 2">
             <a:extLst>
               <a:ext uri="{FF2B5EF4-FFF2-40B4-BE49-F238E27FC236}">
-                <a16:creationId xmlns:a16="http://schemas.microsoft.com/office/drawing/2014/main" id="{91519828-0AF4-4289-1B3D-2E6641626A19}"/>
+                <a16:creationId xmlns:a16="http://schemas.microsoft.com/office/drawing/2014/main" id="{A9BB5485-83CD-4ADC-788C-3012DA67A603}"/>
               </a:ext>
             </a:extLst>
           </p:cNvPr>
@@ -1319,7 +1269,7 @@
           <p:cNvPr id="4" name="Slide Number Placeholder 3">
             <a:extLst>
               <a:ext uri="{FF2B5EF4-FFF2-40B4-BE49-F238E27FC236}">
-                <a16:creationId xmlns:a16="http://schemas.microsoft.com/office/drawing/2014/main" id="{50A3D414-05C1-756C-C326-725DFA14964A}"/>
+                <a16:creationId xmlns:a16="http://schemas.microsoft.com/office/drawing/2014/main" id="{59926DFF-682A-F89C-8456-81E256D8F327}"/>
               </a:ext>
             </a:extLst>
           </p:cNvPr>
@@ -1346,7 +1296,7 @@
     </p:spTree>
     <p:extLst>
       <p:ext uri="{BB962C8B-B14F-4D97-AF65-F5344CB8AC3E}">
-        <p14:creationId xmlns:p14="http://schemas.microsoft.com/office/powerpoint/2010/main" val="3595286576"/>
+        <p14:creationId xmlns:p14="http://schemas.microsoft.com/office/powerpoint/2010/main" val="2173139332"/>
       </p:ext>
     </p:extLst>
   </p:cSld>
@@ -1364,7 +1314,7 @@
         <p:cNvPr id="1" name="">
           <a:extLst>
             <a:ext uri="{FF2B5EF4-FFF2-40B4-BE49-F238E27FC236}">
-              <a16:creationId xmlns:a16="http://schemas.microsoft.com/office/drawing/2014/main" id="{370E2B7F-A949-F9F9-89C9-38C25F2A36B2}"/>
+              <a16:creationId xmlns:a16="http://schemas.microsoft.com/office/drawing/2014/main" id="{129D6D60-9FD2-CB8C-4B46-8FED36359D2A}"/>
             </a:ext>
           </a:extLst>
         </p:cNvPr>
@@ -1384,7 +1334,7 @@
           <p:cNvPr id="2" name="Slide Image Placeholder 1">
             <a:extLst>
               <a:ext uri="{FF2B5EF4-FFF2-40B4-BE49-F238E27FC236}">
-                <a16:creationId xmlns:a16="http://schemas.microsoft.com/office/drawing/2014/main" id="{47133E59-D6F4-95C8-67EB-4EA9CC079276}"/>
+                <a16:creationId xmlns:a16="http://schemas.microsoft.com/office/drawing/2014/main" id="{2A2DC4FE-CF9B-C2DD-25DF-75A1DDBCE9F7}"/>
               </a:ext>
             </a:extLst>
           </p:cNvPr>
@@ -1402,7 +1352,7 @@
           <p:cNvPr id="3" name="Notes Placeholder 2">
             <a:extLst>
               <a:ext uri="{FF2B5EF4-FFF2-40B4-BE49-F238E27FC236}">
-                <a16:creationId xmlns:a16="http://schemas.microsoft.com/office/drawing/2014/main" id="{1DE5A426-80D9-C512-355D-B66C577D5CF7}"/>
+                <a16:creationId xmlns:a16="http://schemas.microsoft.com/office/drawing/2014/main" id="{2D624935-69E2-9C7E-32A5-2CF63CAB93AB}"/>
               </a:ext>
             </a:extLst>
           </p:cNvPr>
@@ -1431,7 +1381,7 @@
           <p:cNvPr id="4" name="Slide Number Placeholder 3">
             <a:extLst>
               <a:ext uri="{FF2B5EF4-FFF2-40B4-BE49-F238E27FC236}">
-                <a16:creationId xmlns:a16="http://schemas.microsoft.com/office/drawing/2014/main" id="{64682562-9641-D188-46D7-19D4029B86D1}"/>
+                <a16:creationId xmlns:a16="http://schemas.microsoft.com/office/drawing/2014/main" id="{CAAB9FCF-7802-E759-F81F-AEE274676465}"/>
               </a:ext>
             </a:extLst>
           </p:cNvPr>
@@ -1458,7 +1408,7 @@
     </p:spTree>
     <p:extLst>
       <p:ext uri="{BB962C8B-B14F-4D97-AF65-F5344CB8AC3E}">
-        <p14:creationId xmlns:p14="http://schemas.microsoft.com/office/powerpoint/2010/main" val="3681584441"/>
+        <p14:creationId xmlns:p14="http://schemas.microsoft.com/office/powerpoint/2010/main" val="1957340802"/>
       </p:ext>
     </p:extLst>
   </p:cSld>
@@ -1476,7 +1426,7 @@
         <p:cNvPr id="1" name="">
           <a:extLst>
             <a:ext uri="{FF2B5EF4-FFF2-40B4-BE49-F238E27FC236}">
-              <a16:creationId xmlns:a16="http://schemas.microsoft.com/office/drawing/2014/main" id="{BC1E67A5-75EC-16C5-A186-1835DB540E20}"/>
+              <a16:creationId xmlns:a16="http://schemas.microsoft.com/office/drawing/2014/main" id="{6F281E3B-9FE8-B99D-0C72-6819B26FB86B}"/>
             </a:ext>
           </a:extLst>
         </p:cNvPr>
@@ -1496,7 +1446,7 @@
           <p:cNvPr id="2" name="Slide Image Placeholder 1">
             <a:extLst>
               <a:ext uri="{FF2B5EF4-FFF2-40B4-BE49-F238E27FC236}">
-                <a16:creationId xmlns:a16="http://schemas.microsoft.com/office/drawing/2014/main" id="{D17D20DD-CD9E-04B1-8693-56F81413C3BE}"/>
+                <a16:creationId xmlns:a16="http://schemas.microsoft.com/office/drawing/2014/main" id="{944905B9-5F62-59A8-1C9B-3049978C6030}"/>
               </a:ext>
             </a:extLst>
           </p:cNvPr>
@@ -1514,7 +1464,7 @@
           <p:cNvPr id="3" name="Notes Placeholder 2">
             <a:extLst>
               <a:ext uri="{FF2B5EF4-FFF2-40B4-BE49-F238E27FC236}">
-                <a16:creationId xmlns:a16="http://schemas.microsoft.com/office/drawing/2014/main" id="{4A363CCF-BAB1-58A4-5B2E-386F198B76F1}"/>
+                <a16:creationId xmlns:a16="http://schemas.microsoft.com/office/drawing/2014/main" id="{30B4AE5F-F3F5-6573-505F-59167FA52274}"/>
               </a:ext>
             </a:extLst>
           </p:cNvPr>
@@ -1543,7 +1493,7 @@
           <p:cNvPr id="4" name="Slide Number Placeholder 3">
             <a:extLst>
               <a:ext uri="{FF2B5EF4-FFF2-40B4-BE49-F238E27FC236}">
-                <a16:creationId xmlns:a16="http://schemas.microsoft.com/office/drawing/2014/main" id="{6D328FF8-B7F0-FD2B-0295-634AFA5E75E4}"/>
+                <a16:creationId xmlns:a16="http://schemas.microsoft.com/office/drawing/2014/main" id="{6256216B-FC0A-80DC-4257-8E8AB982E098}"/>
               </a:ext>
             </a:extLst>
           </p:cNvPr>
@@ -1570,7 +1520,7 @@
     </p:spTree>
     <p:extLst>
       <p:ext uri="{BB962C8B-B14F-4D97-AF65-F5344CB8AC3E}">
-        <p14:creationId xmlns:p14="http://schemas.microsoft.com/office/powerpoint/2010/main" val="2647415934"/>
+        <p14:creationId xmlns:p14="http://schemas.microsoft.com/office/powerpoint/2010/main" val="1323122679"/>
       </p:ext>
     </p:extLst>
   </p:cSld>
@@ -1729,7 +1679,7 @@
           <a:p>
             <a:fld id="{6F5A3FF9-0028-4556-8BB5-EE36D45F941B}" type="datetimeFigureOut">
               <a:rPr lang="LID4096" smtClean="0"/>
-              <a:t>02/27/2026</a:t>
+              <a:t>03/03/2026</a:t>
             </a:fld>
             <a:endParaRPr lang="LID4096"/>
           </a:p>
@@ -1929,7 +1879,7 @@
           <a:p>
             <a:fld id="{6F5A3FF9-0028-4556-8BB5-EE36D45F941B}" type="datetimeFigureOut">
               <a:rPr lang="LID4096" smtClean="0"/>
-              <a:t>02/27/2026</a:t>
+              <a:t>03/03/2026</a:t>
             </a:fld>
             <a:endParaRPr lang="LID4096"/>
           </a:p>
@@ -2139,7 +2089,7 @@
           <a:p>
             <a:fld id="{6F5A3FF9-0028-4556-8BB5-EE36D45F941B}" type="datetimeFigureOut">
               <a:rPr lang="LID4096" smtClean="0"/>
-              <a:t>02/27/2026</a:t>
+              <a:t>03/03/2026</a:t>
             </a:fld>
             <a:endParaRPr lang="LID4096"/>
           </a:p>
@@ -2339,7 +2289,7 @@
           <a:p>
             <a:fld id="{6F5A3FF9-0028-4556-8BB5-EE36D45F941B}" type="datetimeFigureOut">
               <a:rPr lang="LID4096" smtClean="0"/>
-              <a:t>02/27/2026</a:t>
+              <a:t>03/03/2026</a:t>
             </a:fld>
             <a:endParaRPr lang="LID4096"/>
           </a:p>
@@ -2615,7 +2565,7 @@
           <a:p>
             <a:fld id="{6F5A3FF9-0028-4556-8BB5-EE36D45F941B}" type="datetimeFigureOut">
               <a:rPr lang="LID4096" smtClean="0"/>
-              <a:t>02/27/2026</a:t>
+              <a:t>03/03/2026</a:t>
             </a:fld>
             <a:endParaRPr lang="LID4096"/>
           </a:p>
@@ -2883,7 +2833,7 @@
           <a:p>
             <a:fld id="{6F5A3FF9-0028-4556-8BB5-EE36D45F941B}" type="datetimeFigureOut">
               <a:rPr lang="LID4096" smtClean="0"/>
-              <a:t>02/27/2026</a:t>
+              <a:t>03/03/2026</a:t>
             </a:fld>
             <a:endParaRPr lang="LID4096"/>
           </a:p>
@@ -3298,7 +3248,7 @@
           <a:p>
             <a:fld id="{6F5A3FF9-0028-4556-8BB5-EE36D45F941B}" type="datetimeFigureOut">
               <a:rPr lang="LID4096" smtClean="0"/>
-              <a:t>02/27/2026</a:t>
+              <a:t>03/03/2026</a:t>
             </a:fld>
             <a:endParaRPr lang="LID4096"/>
           </a:p>
@@ -3440,7 +3390,7 @@
           <a:p>
             <a:fld id="{6F5A3FF9-0028-4556-8BB5-EE36D45F941B}" type="datetimeFigureOut">
               <a:rPr lang="LID4096" smtClean="0"/>
-              <a:t>02/27/2026</a:t>
+              <a:t>03/03/2026</a:t>
             </a:fld>
             <a:endParaRPr lang="LID4096"/>
           </a:p>
@@ -3553,7 +3503,7 @@
           <a:p>
             <a:fld id="{6F5A3FF9-0028-4556-8BB5-EE36D45F941B}" type="datetimeFigureOut">
               <a:rPr lang="LID4096" smtClean="0"/>
-              <a:t>02/27/2026</a:t>
+              <a:t>03/03/2026</a:t>
             </a:fld>
             <a:endParaRPr lang="LID4096"/>
           </a:p>
@@ -3866,7 +3816,7 @@
           <a:p>
             <a:fld id="{6F5A3FF9-0028-4556-8BB5-EE36D45F941B}" type="datetimeFigureOut">
               <a:rPr lang="LID4096" smtClean="0"/>
-              <a:t>02/27/2026</a:t>
+              <a:t>03/03/2026</a:t>
             </a:fld>
             <a:endParaRPr lang="LID4096"/>
           </a:p>
@@ -4155,7 +4105,7 @@
           <a:p>
             <a:fld id="{6F5A3FF9-0028-4556-8BB5-EE36D45F941B}" type="datetimeFigureOut">
               <a:rPr lang="LID4096" smtClean="0"/>
-              <a:t>02/27/2026</a:t>
+              <a:t>03/03/2026</a:t>
             </a:fld>
             <a:endParaRPr lang="LID4096"/>
           </a:p>
@@ -4398,7 +4348,7 @@
           <a:p>
             <a:fld id="{6F5A3FF9-0028-4556-8BB5-EE36D45F941B}" type="datetimeFigureOut">
               <a:rPr lang="LID4096" smtClean="0"/>
-              <a:t>02/27/2026</a:t>
+              <a:t>03/03/2026</a:t>
             </a:fld>
             <a:endParaRPr lang="LID4096"/>
           </a:p>
@@ -4937,7 +4887,7 @@
         <p:cNvPr id="1" name="">
           <a:extLst>
             <a:ext uri="{FF2B5EF4-FFF2-40B4-BE49-F238E27FC236}">
-              <a16:creationId xmlns:a16="http://schemas.microsoft.com/office/drawing/2014/main" id="{88D508F6-9129-BB6F-D460-CED42DBAC0AC}"/>
+              <a16:creationId xmlns:a16="http://schemas.microsoft.com/office/drawing/2014/main" id="{AF77FE29-0975-DF7C-FFF9-7D270D5FA5EC}"/>
             </a:ext>
           </a:extLst>
         </p:cNvPr>
@@ -4957,7 +4907,7 @@
           <p:cNvPr id="2" name="Rectangle: Rounded Corners 1">
             <a:extLst>
               <a:ext uri="{FF2B5EF4-FFF2-40B4-BE49-F238E27FC236}">
-                <a16:creationId xmlns:a16="http://schemas.microsoft.com/office/drawing/2014/main" id="{59CD4DDF-8CB7-D73B-C912-1E35C81B2AA9}"/>
+                <a16:creationId xmlns:a16="http://schemas.microsoft.com/office/drawing/2014/main" id="{9B076649-6EDD-4C56-92AB-FE116D82B423}"/>
               </a:ext>
             </a:extLst>
           </p:cNvPr>
@@ -5009,7 +4959,7 @@
           <p:cNvPr id="3" name="Graphic 2" descr="Research">
             <a:extLst>
               <a:ext uri="{FF2B5EF4-FFF2-40B4-BE49-F238E27FC236}">
-                <a16:creationId xmlns:a16="http://schemas.microsoft.com/office/drawing/2014/main" id="{C07361D0-0F7F-EDD4-6532-E49B82DC5E3B}"/>
+                <a16:creationId xmlns:a16="http://schemas.microsoft.com/office/drawing/2014/main" id="{5C66D76B-F993-D5D1-6FCC-CEC097EC2B46}"/>
               </a:ext>
             </a:extLst>
           </p:cNvPr>
@@ -5045,7 +4995,7 @@
           <p:cNvPr id="4" name="TextBox 3">
             <a:extLst>
               <a:ext uri="{FF2B5EF4-FFF2-40B4-BE49-F238E27FC236}">
-                <a16:creationId xmlns:a16="http://schemas.microsoft.com/office/drawing/2014/main" id="{CB6A8635-E321-1D87-B214-BFBC3362DCEE}"/>
+                <a16:creationId xmlns:a16="http://schemas.microsoft.com/office/drawing/2014/main" id="{BB8DCFEF-98C3-9B4C-FC5C-A12D7D7349B4}"/>
               </a:ext>
             </a:extLst>
           </p:cNvPr>
@@ -5111,312 +5061,46 @@
           </a:p>
         </p:txBody>
       </p:sp>
-      <mc:AlternateContent xmlns:mc="http://schemas.openxmlformats.org/markup-compatibility/2006">
-        <mc:Choice xmlns:a14="http://schemas.microsoft.com/office/drawing/2010/main" Requires="a14">
-          <p:sp>
-            <p:nvSpPr>
-              <p:cNvPr id="11" name="TextBox 10">
-                <a:extLst>
-                  <a:ext uri="{FF2B5EF4-FFF2-40B4-BE49-F238E27FC236}">
-                    <a16:creationId xmlns:a16="http://schemas.microsoft.com/office/drawing/2014/main" id="{33103675-7004-40EB-29A2-F075FDA2E7F6}"/>
-                  </a:ext>
-                </a:extLst>
-              </p:cNvPr>
-              <p:cNvSpPr txBox="1"/>
-              <p:nvPr/>
-            </p:nvSpPr>
-            <p:spPr>
-              <a:xfrm>
-                <a:off x="4432300" y="1284292"/>
-                <a:ext cx="6096000" cy="4949817"/>
-              </a:xfrm>
-              <a:prstGeom prst="rect">
-                <a:avLst/>
-              </a:prstGeom>
-              <a:noFill/>
-            </p:spPr>
-            <p:txBody>
-              <a:bodyPr wrap="square">
-                <a:spAutoFit/>
-              </a:bodyPr>
-              <a:lstStyle/>
-              <a:p>
-                <a:pPr>
-                  <a:buNone/>
-                </a:pPr>
-                <a:r>
-                  <a:rPr lang="en-US" b="1" dirty="0"/>
-                  <a:t>Measures of Central Tendency</a:t>
-                </a:r>
-              </a:p>
-              <a:p>
-                <a:pPr>
-                  <a:buNone/>
-                </a:pPr>
-                <a:r>
-                  <a:rPr lang="en-US" b="1" dirty="0"/>
-                  <a:t>Mean (Average)</a:t>
-                </a:r>
-                <a:endParaRPr lang="en-US" dirty="0"/>
-              </a:p>
-              <a:p>
-                <a:pPr>
-                  <a:buFont typeface="Arial" panose="020B0604020202020204" pitchFamily="34" charset="0"/>
-                  <a:buChar char="•"/>
-                </a:pPr>
-                <a:r>
-                  <a:rPr lang="en-US" dirty="0"/>
-                  <a:t>Sum of all values divided by number of values</a:t>
-                </a:r>
-              </a:p>
-              <a:p>
-                <a:pPr>
-                  <a:buFont typeface="Arial" panose="020B0604020202020204" pitchFamily="34" charset="0"/>
-                  <a:buChar char="•"/>
-                </a:pPr>
-                <a:r>
-                  <a:rPr lang="en-US" dirty="0"/>
-                  <a:t>Formula: </a:t>
-                </a:r>
-                <a14:m>
-                  <m:oMath xmlns:m="http://schemas.openxmlformats.org/officeDocument/2006/math">
-                    <m:limUpp>
-                      <m:limUppPr>
-                        <m:ctrlPr>
-                          <a:rPr lang="fa-IR" i="1">
-                            <a:latin typeface="Cambria Math" panose="02040503050406030204" pitchFamily="18" charset="0"/>
-                          </a:rPr>
-                        </m:ctrlPr>
-                      </m:limUppPr>
-                      <m:e>
-                        <m:r>
-                          <a:rPr lang="fa-IR" i="1">
-                            <a:latin typeface="Cambria Math" panose="02040503050406030204" pitchFamily="18" charset="0"/>
-                          </a:rPr>
-                          <m:t>𝑥</m:t>
-                        </m:r>
-                      </m:e>
-                      <m:lim>
-                        <m:r>
-                          <a:rPr lang="fa-IR" i="0">
-                            <a:latin typeface="Cambria Math" panose="02040503050406030204" pitchFamily="18" charset="0"/>
-                          </a:rPr>
-                          <m:t>ˉ</m:t>
-                        </m:r>
-                      </m:lim>
-                    </m:limUpp>
-                    <m:r>
-                      <a:rPr lang="fa-IR" i="0">
-                        <a:latin typeface="Cambria Math" panose="02040503050406030204" pitchFamily="18" charset="0"/>
-                      </a:rPr>
-                      <m:t>=</m:t>
-                    </m:r>
-                    <m:f>
-                      <m:fPr>
-                        <m:ctrlPr>
-                          <a:rPr lang="fa-IR" i="1">
-                            <a:latin typeface="Cambria Math" panose="02040503050406030204" pitchFamily="18" charset="0"/>
-                          </a:rPr>
-                        </m:ctrlPr>
-                      </m:fPr>
-                      <m:num>
-                        <m:nary>
-                          <m:naryPr>
-                            <m:chr m:val="∑"/>
-                            <m:grow m:val="on"/>
-                            <m:subHide m:val="on"/>
-                            <m:supHide m:val="on"/>
-                            <m:ctrlPr>
-                              <a:rPr lang="fa-IR" i="1">
-                                <a:latin typeface="Cambria Math" panose="02040503050406030204" pitchFamily="18" charset="0"/>
-                              </a:rPr>
-                            </m:ctrlPr>
-                          </m:naryPr>
-                          <m:sub/>
-                          <m:sup/>
-                          <m:e>
-                            <m:r>
-                              <a:rPr lang="fa-IR" i="1">
-                                <a:latin typeface="Cambria Math" panose="02040503050406030204" pitchFamily="18" charset="0"/>
-                              </a:rPr>
-                              <m:t>𝑥</m:t>
-                            </m:r>
-                          </m:e>
-                        </m:nary>
-                      </m:num>
-                      <m:den>
-                        <m:r>
-                          <a:rPr lang="fa-IR" i="1">
-                            <a:latin typeface="Cambria Math" panose="02040503050406030204" pitchFamily="18" charset="0"/>
-                          </a:rPr>
-                          <m:t>𝑛</m:t>
-                        </m:r>
-                      </m:den>
-                    </m:f>
-                  </m:oMath>
-                </a14:m>
-                <a:endParaRPr lang="fa-IR" dirty="0"/>
-              </a:p>
-              <a:p>
-                <a:pPr>
-                  <a:buFont typeface="Arial" panose="020B0604020202020204" pitchFamily="34" charset="0"/>
-                  <a:buChar char="•"/>
-                </a:pPr>
-                <a:r>
-                  <a:rPr lang="en-US" dirty="0"/>
-                  <a:t>Sensitive to outliers</a:t>
-                </a:r>
-              </a:p>
-              <a:p>
-                <a:pPr>
-                  <a:buNone/>
-                </a:pPr>
-                <a:br>
-                  <a:rPr lang="en-US" dirty="0"/>
-                </a:br>
-                <a:endParaRPr lang="en-US" dirty="0"/>
-              </a:p>
-              <a:p>
-                <a:pPr>
-                  <a:buNone/>
-                </a:pPr>
-                <a:r>
-                  <a:rPr lang="en-US" b="1" dirty="0"/>
-                  <a:t>Median</a:t>
-                </a:r>
-                <a:endParaRPr lang="en-US" dirty="0"/>
-              </a:p>
-              <a:p>
-                <a:pPr>
-                  <a:buFont typeface="Arial" panose="020B0604020202020204" pitchFamily="34" charset="0"/>
-                  <a:buChar char="•"/>
-                </a:pPr>
-                <a:r>
-                  <a:rPr lang="en-US" dirty="0"/>
-                  <a:t>Middle value in a sorted dataset</a:t>
-                </a:r>
-              </a:p>
-              <a:p>
-                <a:pPr>
-                  <a:buFont typeface="Arial" panose="020B0604020202020204" pitchFamily="34" charset="0"/>
-                  <a:buChar char="•"/>
-                </a:pPr>
-                <a:r>
-                  <a:rPr lang="en-US" dirty="0"/>
-                  <a:t>If even number of values → average of two middle values</a:t>
-                </a:r>
-              </a:p>
-              <a:p>
-                <a:pPr>
-                  <a:buFont typeface="Arial" panose="020B0604020202020204" pitchFamily="34" charset="0"/>
-                  <a:buChar char="•"/>
-                </a:pPr>
-                <a:r>
-                  <a:rPr lang="en-US" dirty="0"/>
-                  <a:t>Robust against outliers</a:t>
-                </a:r>
-              </a:p>
-              <a:p>
-                <a:pPr>
-                  <a:buNone/>
-                </a:pPr>
-                <a:br>
-                  <a:rPr lang="en-US" dirty="0"/>
-                </a:br>
-                <a:endParaRPr lang="en-US" dirty="0"/>
-              </a:p>
-              <a:p>
-                <a:pPr>
-                  <a:buNone/>
-                </a:pPr>
-                <a:r>
-                  <a:rPr lang="en-US" b="1" dirty="0"/>
-                  <a:t>Mode</a:t>
-                </a:r>
-                <a:endParaRPr lang="en-US" dirty="0"/>
-              </a:p>
-              <a:p>
-                <a:pPr>
-                  <a:buFont typeface="Arial" panose="020B0604020202020204" pitchFamily="34" charset="0"/>
-                  <a:buChar char="•"/>
-                </a:pPr>
-                <a:r>
-                  <a:rPr lang="en-US" dirty="0"/>
-                  <a:t>Most frequently occurring value</a:t>
-                </a:r>
-              </a:p>
-              <a:p>
-                <a:pPr>
-                  <a:buFont typeface="Arial" panose="020B0604020202020204" pitchFamily="34" charset="0"/>
-                  <a:buChar char="•"/>
-                </a:pPr>
-                <a:r>
-                  <a:rPr lang="en-US" dirty="0"/>
-                  <a:t>Can be unimodal, bimodal, or multimodal</a:t>
-                </a:r>
-              </a:p>
-              <a:p>
-                <a:pPr>
-                  <a:buFont typeface="Arial" panose="020B0604020202020204" pitchFamily="34" charset="0"/>
-                  <a:buChar char="•"/>
-                </a:pPr>
-                <a:r>
-                  <a:rPr lang="en-US" dirty="0"/>
-                  <a:t>Useful for categorical data</a:t>
-                </a:r>
-              </a:p>
-            </p:txBody>
-          </p:sp>
-        </mc:Choice>
-        <mc:Fallback>
-          <p:sp>
-            <p:nvSpPr>
-              <p:cNvPr id="11" name="TextBox 10">
-                <a:extLst>
-                  <a:ext uri="{FF2B5EF4-FFF2-40B4-BE49-F238E27FC236}">
-                    <a16:creationId xmlns:a16="http://schemas.microsoft.com/office/drawing/2014/main" id="{33103675-7004-40EB-29A2-F075FDA2E7F6}"/>
-                  </a:ext>
-                </a:extLst>
-              </p:cNvPr>
-              <p:cNvSpPr txBox="1">
-                <a:spLocks noRot="1" noChangeAspect="1" noMove="1" noResize="1" noEditPoints="1" noAdjustHandles="1" noChangeArrowheads="1" noChangeShapeType="1" noTextEdit="1"/>
-              </p:cNvSpPr>
-              <p:nvPr/>
-            </p:nvSpPr>
-            <p:spPr>
-              <a:xfrm>
-                <a:off x="4432300" y="1284292"/>
-                <a:ext cx="6096000" cy="4949817"/>
-              </a:xfrm>
-              <a:prstGeom prst="rect">
-                <a:avLst/>
-              </a:prstGeom>
-              <a:blipFill>
-                <a:blip r:embed="rId5"/>
-                <a:stretch>
-                  <a:fillRect l="-800" t="-739" b="-985"/>
-                </a:stretch>
-              </a:blipFill>
-            </p:spPr>
-            <p:txBody>
-              <a:bodyPr/>
-              <a:lstStyle/>
-              <a:p>
-                <a:r>
-                  <a:rPr lang="LID4096">
-                    <a:noFill/>
-                  </a:rPr>
-                  <a:t> </a:t>
-                </a:r>
-              </a:p>
-            </p:txBody>
-          </p:sp>
-        </mc:Fallback>
-      </mc:AlternateContent>
+      <p:pic>
+        <p:nvPicPr>
+          <p:cNvPr id="18" name="Picture 17">
+            <a:extLst>
+              <a:ext uri="{FF2B5EF4-FFF2-40B4-BE49-F238E27FC236}">
+                <a16:creationId xmlns:a16="http://schemas.microsoft.com/office/drawing/2014/main" id="{277B9C78-F617-0D09-6D9D-E1C3EE0F5FCF}"/>
+              </a:ext>
+            </a:extLst>
+          </p:cNvPr>
+          <p:cNvPicPr>
+            <a:picLocks noChangeAspect="1"/>
+          </p:cNvPicPr>
+          <p:nvPr/>
+        </p:nvPicPr>
+        <p:blipFill>
+          <a:blip r:embed="rId5">
+            <a:extLst>
+              <a:ext uri="{28A0092B-C50C-407E-A947-70E740481C1C}">
+                <a14:useLocalDpi xmlns:a14="http://schemas.microsoft.com/office/drawing/2010/main" val="0"/>
+              </a:ext>
+            </a:extLst>
+          </a:blip>
+          <a:stretch>
+            <a:fillRect/>
+          </a:stretch>
+        </p:blipFill>
+        <p:spPr>
+          <a:xfrm>
+            <a:off x="4212952" y="427156"/>
+            <a:ext cx="6858000" cy="6858000"/>
+          </a:xfrm>
+          <a:prstGeom prst="rect">
+            <a:avLst/>
+          </a:prstGeom>
+        </p:spPr>
+      </p:pic>
     </p:spTree>
     <p:extLst>
       <p:ext uri="{BB962C8B-B14F-4D97-AF65-F5344CB8AC3E}">
-        <p14:creationId xmlns:p14="http://schemas.microsoft.com/office/powerpoint/2010/main" val="2055639195"/>
+        <p14:creationId xmlns:p14="http://schemas.microsoft.com/office/powerpoint/2010/main" val="2050072976"/>
       </p:ext>
     </p:extLst>
   </p:cSld>
@@ -7323,7 +7007,7 @@
         <p:cNvPr id="1" name="">
           <a:extLst>
             <a:ext uri="{FF2B5EF4-FFF2-40B4-BE49-F238E27FC236}">
-              <a16:creationId xmlns:a16="http://schemas.microsoft.com/office/drawing/2014/main" id="{66BC9FA4-41F4-88F4-294C-581585FB2655}"/>
+              <a16:creationId xmlns:a16="http://schemas.microsoft.com/office/drawing/2014/main" id="{42E36105-F031-BC7E-09F3-4944154D0275}"/>
             </a:ext>
           </a:extLst>
         </p:cNvPr>
@@ -7343,7 +7027,7 @@
           <p:cNvPr id="18" name="TextBox 17">
             <a:extLst>
               <a:ext uri="{FF2B5EF4-FFF2-40B4-BE49-F238E27FC236}">
-                <a16:creationId xmlns:a16="http://schemas.microsoft.com/office/drawing/2014/main" id="{AD235E59-2552-ED54-43A9-937D0AFA77A0}"/>
+                <a16:creationId xmlns:a16="http://schemas.microsoft.com/office/drawing/2014/main" id="{E932FD37-087E-A653-9831-F1C634A927B7}"/>
               </a:ext>
             </a:extLst>
           </p:cNvPr>
@@ -7372,7 +7056,7 @@
             <a:r>
               <a:rPr lang="de-DE" sz="1400" b="1" dirty="0">
                 <a:solidFill>
-                  <a:schemeClr val="accent6">
+                  <a:schemeClr val="accent5">
                     <a:lumMod val="75000"/>
                   </a:schemeClr>
                 </a:solidFill>
@@ -7381,7 +7065,7 @@
             </a:r>
             <a:endParaRPr lang="de-DE" sz="1400" dirty="0">
               <a:solidFill>
-                <a:schemeClr val="accent6">
+                <a:schemeClr val="accent5">
                   <a:lumMod val="75000"/>
                 </a:schemeClr>
               </a:solidFill>
@@ -7393,52 +7077,22 @@
               <a:buChar char="•"/>
             </a:pPr>
             <a:r>
-              <a:rPr lang="de-DE" sz="1400" dirty="0">
-                <a:solidFill>
-                  <a:schemeClr val="accent6">
-                    <a:lumMod val="75000"/>
-                  </a:schemeClr>
-                </a:solidFill>
-              </a:rPr>
+              <a:rPr lang="de-DE" sz="1400" dirty="0"/>
               <a:t>Python, </a:t>
             </a:r>
             <a:r>
-              <a:rPr lang="de-DE" sz="1400" dirty="0" err="1">
-                <a:solidFill>
-                  <a:schemeClr val="accent6">
-                    <a:lumMod val="75000"/>
-                  </a:schemeClr>
-                </a:solidFill>
-              </a:rPr>
+              <a:rPr lang="de-DE" sz="1400" dirty="0" err="1"/>
               <a:t>Jupyter</a:t>
             </a:r>
             <a:r>
-              <a:rPr lang="de-DE" sz="1400" dirty="0">
-                <a:solidFill>
-                  <a:schemeClr val="accent6">
-                    <a:lumMod val="75000"/>
-                  </a:schemeClr>
-                </a:solidFill>
-              </a:rPr>
+              <a:rPr lang="de-DE" sz="1400" dirty="0"/>
               <a:t> Notebook, Bibliotheken installieren, </a:t>
             </a:r>
             <a:r>
-              <a:rPr lang="de-DE" sz="1400" dirty="0" err="1">
-                <a:solidFill>
-                  <a:schemeClr val="accent6">
-                    <a:lumMod val="75000"/>
-                  </a:schemeClr>
-                </a:solidFill>
-              </a:rPr>
+              <a:rPr lang="de-DE" sz="1400" dirty="0" err="1"/>
               <a:t>VSCode</a:t>
             </a:r>
-            <a:endParaRPr lang="de-DE" sz="1400" dirty="0">
-              <a:solidFill>
-                <a:schemeClr val="accent6">
-                  <a:lumMod val="75000"/>
-                </a:schemeClr>
-              </a:solidFill>
-            </a:endParaRPr>
+            <a:endParaRPr lang="de-DE" sz="1400" dirty="0"/>
           </a:p>
           <a:p>
             <a:pPr marL="285750" indent="-285750">
@@ -7446,73 +7100,31 @@
               <a:buChar char="•"/>
             </a:pPr>
             <a:r>
-              <a:rPr lang="en-US" sz="1400" dirty="0" err="1">
-                <a:solidFill>
-                  <a:schemeClr val="accent6">
-                    <a:lumMod val="75000"/>
-                  </a:schemeClr>
-                </a:solidFill>
-              </a:rPr>
+              <a:rPr lang="en-US" sz="1400" dirty="0" err="1"/>
               <a:t>Arbeiten</a:t>
             </a:r>
             <a:r>
-              <a:rPr lang="en-US" sz="1400" dirty="0">
-                <a:solidFill>
-                  <a:schemeClr val="accent6">
-                    <a:lumMod val="75000"/>
-                  </a:schemeClr>
-                </a:solidFill>
-              </a:rPr>
+              <a:rPr lang="en-US" sz="1400" dirty="0"/>
               <a:t> </a:t>
             </a:r>
             <a:r>
-              <a:rPr lang="en-US" sz="1400" dirty="0" err="1">
-                <a:solidFill>
-                  <a:schemeClr val="accent6">
-                    <a:lumMod val="75000"/>
-                  </a:schemeClr>
-                </a:solidFill>
-              </a:rPr>
+              <a:rPr lang="en-US" sz="1400" dirty="0" err="1"/>
               <a:t>mit</a:t>
             </a:r>
             <a:r>
-              <a:rPr lang="en-US" sz="1400" dirty="0">
-                <a:solidFill>
-                  <a:schemeClr val="accent6">
-                    <a:lumMod val="75000"/>
-                  </a:schemeClr>
-                </a:solidFill>
-              </a:rPr>
+              <a:rPr lang="en-US" sz="1400" dirty="0"/>
               <a:t> </a:t>
             </a:r>
             <a:r>
-              <a:rPr lang="en-US" sz="1400" dirty="0" err="1">
-                <a:solidFill>
-                  <a:schemeClr val="accent6">
-                    <a:lumMod val="75000"/>
-                  </a:schemeClr>
-                </a:solidFill>
-              </a:rPr>
+              <a:rPr lang="en-US" sz="1400" dirty="0" err="1"/>
               <a:t>Jupyter</a:t>
             </a:r>
             <a:r>
-              <a:rPr lang="en-US" sz="1400" dirty="0">
-                <a:solidFill>
-                  <a:schemeClr val="accent6">
-                    <a:lumMod val="75000"/>
-                  </a:schemeClr>
-                </a:solidFill>
-              </a:rPr>
+              <a:rPr lang="en-US" sz="1400" dirty="0"/>
               <a:t> | </a:t>
             </a:r>
             <a:r>
-              <a:rPr lang="de-DE" sz="1400" dirty="0">
-                <a:solidFill>
-                  <a:schemeClr val="accent6">
-                    <a:lumMod val="75000"/>
-                  </a:schemeClr>
-                </a:solidFill>
-              </a:rPr>
+              <a:rPr lang="de-DE" sz="1400" dirty="0"/>
               <a:t>Überblick über Datentypen </a:t>
             </a:r>
           </a:p>
@@ -7522,13 +7134,7 @@
               <a:buChar char="•"/>
             </a:pPr>
             <a:r>
-              <a:rPr lang="de-DE" sz="1400" dirty="0">
-                <a:solidFill>
-                  <a:schemeClr val="accent6">
-                    <a:lumMod val="75000"/>
-                  </a:schemeClr>
-                </a:solidFill>
-              </a:rPr>
+              <a:rPr lang="de-DE" sz="1400" dirty="0"/>
               <a:t>Data | Information | Dataset</a:t>
             </a:r>
           </a:p>
@@ -7537,13 +7143,7 @@
               <a:buFont typeface="Arial" panose="020B0604020202020204" pitchFamily="34" charset="0"/>
               <a:buChar char="•"/>
             </a:pPr>
-            <a:endParaRPr lang="de-DE" sz="1400" dirty="0">
-              <a:solidFill>
-                <a:schemeClr val="accent6">
-                  <a:lumMod val="75000"/>
-                </a:schemeClr>
-              </a:solidFill>
-            </a:endParaRPr>
+            <a:endParaRPr lang="de-DE" sz="1400" dirty="0"/>
           </a:p>
           <a:p>
             <a:pPr>
@@ -7552,7 +7152,7 @@
             <a:r>
               <a:rPr lang="de-DE" sz="1400" b="1" dirty="0">
                 <a:solidFill>
-                  <a:schemeClr val="accent6">
+                  <a:schemeClr val="accent5">
                     <a:lumMod val="75000"/>
                   </a:schemeClr>
                 </a:solidFill>
@@ -7561,7 +7161,7 @@
             </a:r>
             <a:endParaRPr lang="de-DE" sz="1400" dirty="0">
               <a:solidFill>
-                <a:schemeClr val="accent6">
+                <a:schemeClr val="accent5">
                   <a:lumMod val="75000"/>
                 </a:schemeClr>
               </a:solidFill>
@@ -7573,13 +7173,7 @@
               <a:buChar char="•"/>
             </a:pPr>
             <a:r>
-              <a:rPr lang="de-DE" sz="1400" dirty="0">
-                <a:solidFill>
-                  <a:schemeClr val="accent6">
-                    <a:lumMod val="75000"/>
-                  </a:schemeClr>
-                </a:solidFill>
-              </a:rPr>
+              <a:rPr lang="de-DE" sz="1400" dirty="0"/>
               <a:t>Analysefragen &amp; Ziele identifizieren</a:t>
             </a:r>
           </a:p>
@@ -7589,13 +7183,7 @@
               <a:buChar char="•"/>
             </a:pPr>
             <a:r>
-              <a:rPr lang="de-DE" sz="1400" dirty="0">
-                <a:solidFill>
-                  <a:schemeClr val="accent6">
-                    <a:lumMod val="75000"/>
-                  </a:schemeClr>
-                </a:solidFill>
-              </a:rPr>
+              <a:rPr lang="de-DE" sz="1400" dirty="0"/>
               <a:t>KPIs mit Geschäftsentscheidungen verknüpfen</a:t>
             </a:r>
           </a:p>
@@ -7604,13 +7192,7 @@
               <a:buFont typeface="Arial" panose="020B0604020202020204" pitchFamily="34" charset="0"/>
               <a:buChar char="•"/>
             </a:pPr>
-            <a:endParaRPr lang="de-DE" sz="1400" dirty="0">
-              <a:solidFill>
-                <a:schemeClr val="accent6">
-                  <a:lumMod val="75000"/>
-                </a:schemeClr>
-              </a:solidFill>
-            </a:endParaRPr>
+            <a:endParaRPr lang="de-DE" sz="1400" dirty="0"/>
           </a:p>
           <a:p>
             <a:pPr>
@@ -7619,7 +7201,7 @@
             <a:r>
               <a:rPr lang="de-DE" sz="1400" b="1" dirty="0">
                 <a:solidFill>
-                  <a:schemeClr val="accent6">
+                  <a:schemeClr val="accent5">
                     <a:lumMod val="75000"/>
                   </a:schemeClr>
                 </a:solidFill>
@@ -7628,7 +7210,7 @@
             </a:r>
             <a:endParaRPr lang="de-DE" sz="1400" dirty="0">
               <a:solidFill>
-                <a:schemeClr val="accent6">
+                <a:schemeClr val="accent5">
                   <a:lumMod val="75000"/>
                 </a:schemeClr>
               </a:solidFill>
@@ -7640,13 +7222,7 @@
               <a:buChar char="•"/>
             </a:pPr>
             <a:r>
-              <a:rPr lang="de-DE" sz="1400" dirty="0">
-                <a:solidFill>
-                  <a:schemeClr val="accent6">
-                    <a:lumMod val="75000"/>
-                  </a:schemeClr>
-                </a:solidFill>
-              </a:rPr>
+              <a:rPr lang="de-DE" sz="1400" dirty="0"/>
               <a:t>Daten sammeln: APIs, lokale Dateien, unstrukturierte Daten</a:t>
             </a:r>
           </a:p>
@@ -7656,13 +7232,7 @@
               <a:buChar char="•"/>
             </a:pPr>
             <a:r>
-              <a:rPr lang="de-DE" sz="1400" dirty="0">
-                <a:solidFill>
-                  <a:schemeClr val="accent6">
-                    <a:lumMod val="75000"/>
-                  </a:schemeClr>
-                </a:solidFill>
-              </a:rPr>
+              <a:rPr lang="de-DE" sz="1400" dirty="0"/>
               <a:t>Vollständigkeit, Genauigkeit, Konsistenz prüfen</a:t>
             </a:r>
           </a:p>
@@ -7672,13 +7242,7 @@
               <a:buChar char="•"/>
             </a:pPr>
             <a:r>
-              <a:rPr lang="de-DE" sz="1400" dirty="0">
-                <a:solidFill>
-                  <a:schemeClr val="accent6">
-                    <a:lumMod val="75000"/>
-                  </a:schemeClr>
-                </a:solidFill>
-              </a:rPr>
+              <a:rPr lang="de-DE" sz="1400" dirty="0"/>
               <a:t>Daten laden &amp; inspizieren</a:t>
             </a:r>
           </a:p>
@@ -7688,13 +7252,7 @@
               <a:buChar char="•"/>
             </a:pPr>
             <a:r>
-              <a:rPr lang="de-DE" sz="1400" dirty="0">
-                <a:solidFill>
-                  <a:schemeClr val="accent6">
-                    <a:lumMod val="75000"/>
-                  </a:schemeClr>
-                </a:solidFill>
-              </a:rPr>
+              <a:rPr lang="de-DE" sz="1400" dirty="0"/>
               <a:t>Fehlende Werte, Duplikate, Format prüfen</a:t>
             </a:r>
           </a:p>
@@ -7703,13 +7261,7 @@
               <a:buFont typeface="Arial" panose="020B0604020202020204" pitchFamily="34" charset="0"/>
               <a:buChar char="•"/>
             </a:pPr>
-            <a:endParaRPr lang="de-DE" sz="1400" dirty="0">
-              <a:solidFill>
-                <a:schemeClr val="accent6">
-                  <a:lumMod val="75000"/>
-                </a:schemeClr>
-              </a:solidFill>
-            </a:endParaRPr>
+            <a:endParaRPr lang="de-DE" sz="1400" dirty="0"/>
           </a:p>
           <a:p>
             <a:pPr>
@@ -7718,7 +7270,7 @@
             <a:r>
               <a:rPr lang="de-DE" sz="1400" b="1" dirty="0">
                 <a:solidFill>
-                  <a:schemeClr val="accent6">
+                  <a:schemeClr val="accent5">
                     <a:lumMod val="75000"/>
                   </a:schemeClr>
                 </a:solidFill>
@@ -7727,7 +7279,7 @@
             </a:r>
             <a:endParaRPr lang="de-DE" sz="1400" dirty="0">
               <a:solidFill>
-                <a:schemeClr val="accent6">
+                <a:schemeClr val="accent5">
                   <a:lumMod val="75000"/>
                 </a:schemeClr>
               </a:solidFill>
@@ -7739,13 +7291,7 @@
               <a:buChar char="•"/>
             </a:pPr>
             <a:r>
-              <a:rPr lang="de-DE" sz="1400" dirty="0">
-                <a:solidFill>
-                  <a:schemeClr val="accent6">
-                    <a:lumMod val="75000"/>
-                  </a:schemeClr>
-                </a:solidFill>
-              </a:rPr>
+              <a:rPr lang="de-DE" sz="1400" dirty="0"/>
               <a:t>Fehlende/falsche Werte korrigieren</a:t>
             </a:r>
           </a:p>
@@ -7755,13 +7301,7 @@
               <a:buChar char="•"/>
             </a:pPr>
             <a:r>
-              <a:rPr lang="de-DE" sz="1400" dirty="0">
-                <a:solidFill>
-                  <a:schemeClr val="accent6">
-                    <a:lumMod val="75000"/>
-                  </a:schemeClr>
-                </a:solidFill>
-              </a:rPr>
+              <a:rPr lang="de-DE" sz="1400" dirty="0"/>
               <a:t>Formate standardisieren</a:t>
             </a:r>
           </a:p>
@@ -7771,13 +7311,7 @@
               <a:buChar char="•"/>
             </a:pPr>
             <a:r>
-              <a:rPr lang="de-DE" sz="1400" dirty="0">
-                <a:solidFill>
-                  <a:schemeClr val="accent6">
-                    <a:lumMod val="75000"/>
-                  </a:schemeClr>
-                </a:solidFill>
-              </a:rPr>
+              <a:rPr lang="de-DE" sz="1400" dirty="0"/>
               <a:t>Variablen für Analyse transformieren</a:t>
             </a:r>
           </a:p>
@@ -7788,7 +7322,7 @@
           <p:cNvPr id="20" name="TextBox 19">
             <a:extLst>
               <a:ext uri="{FF2B5EF4-FFF2-40B4-BE49-F238E27FC236}">
-                <a16:creationId xmlns:a16="http://schemas.microsoft.com/office/drawing/2014/main" id="{24CF3EB5-ED24-30EC-BEED-923666843339}"/>
+                <a16:creationId xmlns:a16="http://schemas.microsoft.com/office/drawing/2014/main" id="{FB6082F7-0D57-170A-B2B8-78F66D9E8E25}"/>
               </a:ext>
             </a:extLst>
           </p:cNvPr>
@@ -7798,7 +7332,7 @@
         <p:spPr>
           <a:xfrm>
             <a:off x="5950910" y="1490503"/>
-            <a:ext cx="6096680" cy="4708981"/>
+            <a:ext cx="6096680" cy="4739759"/>
           </a:xfrm>
           <a:prstGeom prst="rect">
             <a:avLst/>
@@ -7817,7 +7351,7 @@
             <a:r>
               <a:rPr lang="en-US" sz="1400" b="1" dirty="0" err="1">
                 <a:solidFill>
-                  <a:schemeClr val="accent6">
+                  <a:schemeClr val="accent5">
                     <a:lumMod val="75000"/>
                   </a:schemeClr>
                 </a:solidFill>
@@ -7827,7 +7361,7 @@
             <a:r>
               <a:rPr lang="en-US" sz="1400" b="1" dirty="0">
                 <a:solidFill>
-                  <a:schemeClr val="accent6">
+                  <a:schemeClr val="accent5">
                     <a:lumMod val="75000"/>
                   </a:schemeClr>
                 </a:solidFill>
@@ -7836,7 +7370,7 @@
             </a:r>
             <a:endParaRPr lang="en-US" sz="1400" dirty="0">
               <a:solidFill>
-                <a:schemeClr val="accent6">
+                <a:schemeClr val="accent5">
                   <a:lumMod val="75000"/>
                 </a:schemeClr>
               </a:solidFill>
@@ -7848,49 +7382,71 @@
               <a:buChar char="•"/>
             </a:pPr>
             <a:r>
-              <a:rPr lang="en-US" sz="1400" dirty="0">
+              <a:rPr lang="en-US" sz="1400" dirty="0"/>
+              <a:t>Daten in </a:t>
+            </a:r>
+            <a:r>
+              <a:rPr lang="en-US" sz="1400" dirty="0" err="1"/>
+              <a:t>Tabellen</a:t>
+            </a:r>
+            <a:r>
+              <a:rPr lang="en-US" sz="1400" dirty="0"/>
+              <a:t> &amp; </a:t>
+            </a:r>
+            <a:r>
+              <a:rPr lang="en-US" sz="1400" dirty="0" err="1"/>
+              <a:t>Beziehungen</a:t>
+            </a:r>
+            <a:r>
+              <a:rPr lang="en-US" sz="1400" dirty="0"/>
+              <a:t> </a:t>
+            </a:r>
+            <a:r>
+              <a:rPr lang="en-US" sz="1400" dirty="0" err="1"/>
+              <a:t>organisieren</a:t>
+            </a:r>
+            <a:endParaRPr lang="en-US" sz="1400" dirty="0"/>
+          </a:p>
+          <a:p>
+            <a:pPr marL="285750" indent="-285750">
+              <a:buFont typeface="Arial" panose="020B0604020202020204" pitchFamily="34" charset="0"/>
+              <a:buChar char="•"/>
+            </a:pPr>
+            <a:r>
+              <a:rPr lang="en-US" sz="1400" dirty="0"/>
+              <a:t>Feature Engineering &amp; </a:t>
+            </a:r>
+            <a:r>
+              <a:rPr lang="en-US" sz="1400" dirty="0" err="1"/>
+              <a:t>Aggregationen</a:t>
+            </a:r>
+            <a:r>
+              <a:rPr lang="en-US" sz="1400" dirty="0"/>
+              <a:t> </a:t>
+            </a:r>
+          </a:p>
+          <a:p>
+            <a:pPr>
+              <a:buFont typeface="Arial" panose="020B0604020202020204" pitchFamily="34" charset="0"/>
+              <a:buChar char="•"/>
+            </a:pPr>
+            <a:endParaRPr lang="en-US" sz="1400" dirty="0"/>
+          </a:p>
+          <a:p>
+            <a:r>
+              <a:rPr lang="en-US" sz="1400" b="1" dirty="0" err="1">
                 <a:solidFill>
-                  <a:schemeClr val="accent6">
+                  <a:schemeClr val="accent5">
                     <a:lumMod val="75000"/>
                   </a:schemeClr>
                 </a:solidFill>
               </a:rPr>
-              <a:t>Daten in </a:t>
-            </a:r>
-            <a:r>
-              <a:rPr lang="en-US" sz="1400" dirty="0" err="1">
+              <a:t>Deskriptive</a:t>
+            </a:r>
+            <a:r>
+              <a:rPr lang="en-US" sz="1400" b="1" dirty="0">
                 <a:solidFill>
-                  <a:schemeClr val="accent6">
-                    <a:lumMod val="75000"/>
-                  </a:schemeClr>
-                </a:solidFill>
-              </a:rPr>
-              <a:t>Tabellen</a:t>
-            </a:r>
-            <a:r>
-              <a:rPr lang="en-US" sz="1400" dirty="0">
-                <a:solidFill>
-                  <a:schemeClr val="accent6">
-                    <a:lumMod val="75000"/>
-                  </a:schemeClr>
-                </a:solidFill>
-              </a:rPr>
-              <a:t> &amp; </a:t>
-            </a:r>
-            <a:r>
-              <a:rPr lang="en-US" sz="1400" dirty="0" err="1">
-                <a:solidFill>
-                  <a:schemeClr val="accent6">
-                    <a:lumMod val="75000"/>
-                  </a:schemeClr>
-                </a:solidFill>
-              </a:rPr>
-              <a:t>Beziehungen</a:t>
-            </a:r>
-            <a:r>
-              <a:rPr lang="en-US" sz="1400" dirty="0">
-                <a:solidFill>
-                  <a:schemeClr val="accent6">
+                  <a:schemeClr val="accent5">
                     <a:lumMod val="75000"/>
                   </a:schemeClr>
                 </a:solidFill>
@@ -7898,57 +7454,155 @@
               <a:t> </a:t>
             </a:r>
             <a:r>
-              <a:rPr lang="en-US" sz="1400" dirty="0" err="1">
+              <a:rPr lang="en-US" sz="1400" b="1" dirty="0" err="1">
                 <a:solidFill>
-                  <a:schemeClr val="accent6">
+                  <a:schemeClr val="accent5">
                     <a:lumMod val="75000"/>
                   </a:schemeClr>
                 </a:solidFill>
               </a:rPr>
-              <a:t>organisieren</a:t>
+              <a:t>Statistik</a:t>
+            </a:r>
+            <a:r>
+              <a:rPr lang="en-US" sz="1400" b="1" dirty="0">
+                <a:solidFill>
+                  <a:schemeClr val="accent5">
+                    <a:lumMod val="75000"/>
+                  </a:schemeClr>
+                </a:solidFill>
+              </a:rPr>
+              <a:t> &amp; KPIs</a:t>
             </a:r>
             <a:endParaRPr lang="en-US" sz="1400" dirty="0">
               <a:solidFill>
-                <a:schemeClr val="accent6">
+                <a:schemeClr val="accent5">
                   <a:lumMod val="75000"/>
                 </a:schemeClr>
               </a:solidFill>
             </a:endParaRPr>
           </a:p>
           <a:p>
+            <a:r>
+              <a:rPr lang="en-US" sz="1400" dirty="0" err="1"/>
+              <a:t>Mittelwert</a:t>
+            </a:r>
+            <a:r>
+              <a:rPr lang="en-US" sz="1400" dirty="0"/>
+              <a:t>, Median, Modus, </a:t>
+            </a:r>
+            <a:r>
+              <a:rPr lang="en-US" sz="1400" dirty="0" err="1"/>
+              <a:t>Standardabweichung</a:t>
+            </a:r>
+            <a:r>
+              <a:rPr lang="en-US" sz="1400" dirty="0"/>
+              <a:t>, </a:t>
+            </a:r>
+            <a:r>
+              <a:rPr lang="en-US" sz="1400" dirty="0" err="1"/>
+              <a:t>Spannweite</a:t>
+            </a:r>
+            <a:endParaRPr lang="en-US" sz="1400" dirty="0"/>
+          </a:p>
+          <a:p>
+            <a:r>
+              <a:rPr lang="en-US" sz="1400" dirty="0" err="1"/>
+              <a:t>Korrelationen</a:t>
+            </a:r>
+            <a:r>
+              <a:rPr lang="en-US" sz="1400" dirty="0"/>
+              <a:t> &amp; </a:t>
+            </a:r>
+            <a:r>
+              <a:rPr lang="en-US" sz="1400" dirty="0" err="1"/>
+              <a:t>Kreuztabellen</a:t>
+            </a:r>
+            <a:endParaRPr lang="en-US" sz="1400" dirty="0"/>
+          </a:p>
+          <a:p>
+            <a:endParaRPr lang="en-US" sz="1400" dirty="0"/>
+          </a:p>
+          <a:p>
+            <a:pPr>
+              <a:buNone/>
+            </a:pPr>
+            <a:r>
+              <a:rPr lang="en-US" sz="1600" b="1" dirty="0" err="1">
+                <a:solidFill>
+                  <a:srgbClr val="FF9933"/>
+                </a:solidFill>
+              </a:rPr>
+              <a:t>Datenvisualisierung</a:t>
+            </a:r>
+            <a:endParaRPr lang="en-US" sz="1600" b="1" dirty="0">
+              <a:solidFill>
+                <a:srgbClr val="FF9933"/>
+              </a:solidFill>
+            </a:endParaRPr>
+          </a:p>
+          <a:p>
             <a:pPr marL="285750" indent="-285750">
               <a:buFont typeface="Arial" panose="020B0604020202020204" pitchFamily="34" charset="0"/>
               <a:buChar char="•"/>
             </a:pPr>
             <a:r>
-              <a:rPr lang="en-US" sz="1400" dirty="0">
-                <a:solidFill>
-                  <a:schemeClr val="accent6">
-                    <a:lumMod val="75000"/>
-                  </a:schemeClr>
-                </a:solidFill>
-              </a:rPr>
-              <a:t>Feature Engineering &amp; </a:t>
-            </a:r>
-            <a:r>
-              <a:rPr lang="en-US" sz="1400" dirty="0" err="1">
-                <a:solidFill>
-                  <a:schemeClr val="accent6">
-                    <a:lumMod val="75000"/>
-                  </a:schemeClr>
-                </a:solidFill>
-              </a:rPr>
-              <a:t>Aggregationen</a:t>
-            </a:r>
-            <a:r>
-              <a:rPr lang="en-US" sz="1400" dirty="0">
-                <a:solidFill>
-                  <a:schemeClr val="accent6">
-                    <a:lumMod val="75000"/>
-                  </a:schemeClr>
-                </a:solidFill>
-              </a:rPr>
+              <a:rPr lang="en-US" sz="1600" b="1" dirty="0" err="1"/>
+              <a:t>Klassische</a:t>
+            </a:r>
+            <a:r>
+              <a:rPr lang="en-US" sz="1600" b="1" dirty="0"/>
               <a:t> </a:t>
+            </a:r>
+            <a:r>
+              <a:rPr lang="en-US" sz="1600" b="1" dirty="0" err="1"/>
+              <a:t>Diagramme</a:t>
+            </a:r>
+            <a:r>
+              <a:rPr lang="en-US" sz="1600" b="1" dirty="0"/>
+              <a:t>; </a:t>
+            </a:r>
+            <a:r>
+              <a:rPr lang="en-US" sz="1600" b="1" dirty="0" err="1"/>
+              <a:t>Balkendiagramm</a:t>
+            </a:r>
+            <a:r>
+              <a:rPr lang="en-US" sz="1600" b="1" dirty="0"/>
+              <a:t>, </a:t>
+            </a:r>
+            <a:r>
+              <a:rPr lang="en-US" sz="1600" b="1" dirty="0" err="1"/>
+              <a:t>Histogramm</a:t>
+            </a:r>
+            <a:r>
+              <a:rPr lang="en-US" sz="1600" b="1" dirty="0"/>
+              <a:t>, Boxplot, </a:t>
+            </a:r>
+            <a:r>
+              <a:rPr lang="en-US" sz="1600" b="1" dirty="0" err="1"/>
+              <a:t>Liniendiagramm</a:t>
+            </a:r>
+            <a:r>
+              <a:rPr lang="en-US" sz="1600" b="1" dirty="0"/>
+              <a:t>, </a:t>
+            </a:r>
+            <a:r>
+              <a:rPr lang="en-US" sz="1600" b="1" dirty="0" err="1"/>
+              <a:t>Streudiagramm</a:t>
+            </a:r>
+            <a:endParaRPr lang="en-US" sz="1600" b="1" dirty="0"/>
+          </a:p>
+          <a:p>
+            <a:pPr marL="285750" indent="-285750">
+              <a:buFont typeface="Arial" panose="020B0604020202020204" pitchFamily="34" charset="0"/>
+              <a:buChar char="•"/>
+            </a:pPr>
+            <a:r>
+              <a:rPr lang="en-US" sz="1600" b="1" dirty="0" err="1"/>
+              <a:t>Interaktive</a:t>
+            </a:r>
+            <a:r>
+              <a:rPr lang="en-US" sz="1600" b="1" dirty="0"/>
+              <a:t> Charts</a:t>
             </a:r>
           </a:p>
           <a:p>
@@ -7959,103 +7613,23 @@
             <a:endParaRPr lang="en-US" sz="1400" dirty="0"/>
           </a:p>
           <a:p>
-            <a:r>
-              <a:rPr lang="en-US" sz="1600" b="1" dirty="0" err="1">
-                <a:solidFill>
-                  <a:srgbClr val="FF9933"/>
-                </a:solidFill>
-              </a:rPr>
-              <a:t>Deskriptive</a:t>
-            </a:r>
-            <a:r>
-              <a:rPr lang="en-US" sz="1600" b="1" dirty="0">
-                <a:solidFill>
-                  <a:srgbClr val="FF9933"/>
-                </a:solidFill>
-              </a:rPr>
-              <a:t> </a:t>
-            </a:r>
-            <a:r>
-              <a:rPr lang="en-US" sz="1600" b="1" dirty="0" err="1">
-                <a:solidFill>
-                  <a:srgbClr val="FF9933"/>
-                </a:solidFill>
-              </a:rPr>
-              <a:t>Statistik</a:t>
-            </a:r>
-            <a:r>
-              <a:rPr lang="en-US" sz="1600" b="1" dirty="0">
-                <a:solidFill>
-                  <a:srgbClr val="FF9933"/>
-                </a:solidFill>
-              </a:rPr>
-              <a:t> &amp; KPIs</a:t>
-            </a:r>
-            <a:endParaRPr lang="en-US" sz="1600" dirty="0">
-              <a:solidFill>
-                <a:srgbClr val="FF9933"/>
-              </a:solidFill>
-            </a:endParaRPr>
-          </a:p>
-          <a:p>
-            <a:r>
-              <a:rPr lang="en-US" sz="1600" dirty="0" err="1"/>
-              <a:t>Mittelwert</a:t>
-            </a:r>
-            <a:r>
-              <a:rPr lang="en-US" sz="1600" dirty="0"/>
-              <a:t>, Median, Modus, </a:t>
-            </a:r>
-            <a:r>
-              <a:rPr lang="en-US" sz="1600" dirty="0" err="1"/>
-              <a:t>Standardabweichung</a:t>
-            </a:r>
-            <a:r>
-              <a:rPr lang="en-US" sz="1600" dirty="0"/>
-              <a:t>, </a:t>
-            </a:r>
-            <a:r>
-              <a:rPr lang="en-US" sz="1600" dirty="0" err="1"/>
-              <a:t>Spannweite</a:t>
-            </a:r>
-            <a:endParaRPr lang="en-US" sz="1600" dirty="0"/>
-          </a:p>
-          <a:p>
-            <a:r>
-              <a:rPr lang="en-US" sz="1600" dirty="0" err="1"/>
-              <a:t>Korrelationen</a:t>
-            </a:r>
-            <a:r>
-              <a:rPr lang="en-US" sz="1600" dirty="0"/>
-              <a:t> &amp; </a:t>
-            </a:r>
-            <a:r>
-              <a:rPr lang="en-US" sz="1600" dirty="0" err="1"/>
-              <a:t>Kreuztabellen</a:t>
-            </a:r>
-            <a:endParaRPr lang="en-US" sz="1600" dirty="0"/>
-          </a:p>
-          <a:p>
-            <a:endParaRPr lang="en-US" sz="1400" dirty="0"/>
-          </a:p>
-          <a:p>
             <a:pPr>
               <a:buNone/>
             </a:pPr>
             <a:r>
-              <a:rPr lang="en-US" sz="1400" b="1" dirty="0" err="1">
+              <a:rPr lang="en-US" sz="1400" b="1" dirty="0">
                 <a:solidFill>
-                  <a:schemeClr val="bg2">
-                    <a:lumMod val="50000"/>
+                  <a:schemeClr val="accent5">
+                    <a:lumMod val="75000"/>
                   </a:schemeClr>
                 </a:solidFill>
               </a:rPr>
-              <a:t>Datenvisualisierung</a:t>
+              <a:t>Analytics-Workflow &amp; Integration</a:t>
             </a:r>
             <a:endParaRPr lang="en-US" sz="1400" dirty="0">
               <a:solidFill>
-                <a:schemeClr val="bg2">
-                  <a:lumMod val="50000"/>
+                <a:schemeClr val="accent5">
+                  <a:lumMod val="75000"/>
                 </a:schemeClr>
               </a:solidFill>
             </a:endParaRPr>
@@ -8066,122 +7640,9 @@
               <a:buChar char="•"/>
             </a:pPr>
             <a:r>
-              <a:rPr lang="en-US" sz="1400" dirty="0" err="1">
-                <a:solidFill>
-                  <a:schemeClr val="bg2">
-                    <a:lumMod val="50000"/>
-                  </a:schemeClr>
-                </a:solidFill>
-              </a:rPr>
-              <a:t>Klassische</a:t>
-            </a:r>
-            <a:r>
-              <a:rPr lang="en-US" sz="1400" dirty="0">
-                <a:solidFill>
-                  <a:schemeClr val="bg2">
-                    <a:lumMod val="50000"/>
-                  </a:schemeClr>
-                </a:solidFill>
-              </a:rPr>
-              <a:t> </a:t>
-            </a:r>
-            <a:r>
-              <a:rPr lang="en-US" sz="1400" dirty="0" err="1">
-                <a:solidFill>
-                  <a:schemeClr val="bg2">
-                    <a:lumMod val="50000"/>
-                  </a:schemeClr>
-                </a:solidFill>
-              </a:rPr>
-              <a:t>Diagramme</a:t>
-            </a:r>
-            <a:r>
-              <a:rPr lang="en-US" sz="1400" dirty="0">
-                <a:solidFill>
-                  <a:schemeClr val="bg2">
-                    <a:lumMod val="50000"/>
-                  </a:schemeClr>
-                </a:solidFill>
-              </a:rPr>
-              <a:t>; </a:t>
-            </a:r>
-            <a:r>
-              <a:rPr lang="en-US" sz="1400" dirty="0" err="1">
-                <a:solidFill>
-                  <a:schemeClr val="bg2">
-                    <a:lumMod val="50000"/>
-                  </a:schemeClr>
-                </a:solidFill>
-              </a:rPr>
-              <a:t>Balkendiagramm</a:t>
-            </a:r>
-            <a:r>
-              <a:rPr lang="en-US" sz="1400" dirty="0">
-                <a:solidFill>
-                  <a:schemeClr val="bg2">
-                    <a:lumMod val="50000"/>
-                  </a:schemeClr>
-                </a:solidFill>
-              </a:rPr>
-              <a:t>, </a:t>
-            </a:r>
-            <a:r>
-              <a:rPr lang="en-US" sz="1400" dirty="0" err="1">
-                <a:solidFill>
-                  <a:schemeClr val="bg2">
-                    <a:lumMod val="50000"/>
-                  </a:schemeClr>
-                </a:solidFill>
-              </a:rPr>
-              <a:t>Histogramm</a:t>
-            </a:r>
-            <a:r>
-              <a:rPr lang="en-US" sz="1400" dirty="0">
-                <a:solidFill>
-                  <a:schemeClr val="bg2">
-                    <a:lumMod val="50000"/>
-                  </a:schemeClr>
-                </a:solidFill>
-              </a:rPr>
-              <a:t>, Boxplot, </a:t>
-            </a:r>
-            <a:r>
-              <a:rPr lang="en-US" sz="1400" dirty="0" err="1">
-                <a:solidFill>
-                  <a:schemeClr val="bg2">
-                    <a:lumMod val="50000"/>
-                  </a:schemeClr>
-                </a:solidFill>
-              </a:rPr>
-              <a:t>Liniendiagramm</a:t>
-            </a:r>
-            <a:r>
-              <a:rPr lang="en-US" sz="1400" dirty="0">
-                <a:solidFill>
-                  <a:schemeClr val="bg2">
-                    <a:lumMod val="50000"/>
-                  </a:schemeClr>
-                </a:solidFill>
-              </a:rPr>
-              <a:t>, </a:t>
-            </a:r>
-            <a:r>
-              <a:rPr lang="en-US" sz="1400" dirty="0" err="1">
-                <a:solidFill>
-                  <a:schemeClr val="bg2">
-                    <a:lumMod val="50000"/>
-                  </a:schemeClr>
-                </a:solidFill>
-              </a:rPr>
-              <a:t>Streudiagramm</a:t>
-            </a:r>
-            <a:endParaRPr lang="en-US" sz="1400" dirty="0">
-              <a:solidFill>
-                <a:schemeClr val="bg2">
-                  <a:lumMod val="50000"/>
-                </a:schemeClr>
-              </a:solidFill>
-            </a:endParaRPr>
+              <a:rPr lang="en-US" sz="1400" dirty="0"/>
+              <a:t>Strukturierter Workflow</a:t>
+            </a:r>
           </a:p>
           <a:p>
             <a:pPr marL="285750" indent="-285750">
@@ -8189,60 +7650,64 @@
               <a:buChar char="•"/>
             </a:pPr>
             <a:r>
-              <a:rPr lang="en-US" sz="1400" dirty="0" err="1">
+              <a:rPr lang="en-US" sz="1400" dirty="0"/>
+              <a:t>Mini-</a:t>
+            </a:r>
+            <a:r>
+              <a:rPr lang="en-US" sz="1400" dirty="0" err="1"/>
+              <a:t>Fallbeispiele</a:t>
+            </a:r>
+            <a:r>
+              <a:rPr lang="en-US" sz="1400" dirty="0"/>
+              <a:t> </a:t>
+            </a:r>
+            <a:r>
+              <a:rPr lang="en-US" sz="1400" dirty="0" err="1"/>
+              <a:t>mit</a:t>
+            </a:r>
+            <a:r>
+              <a:rPr lang="en-US" sz="1400" dirty="0"/>
+              <a:t> </a:t>
+            </a:r>
+            <a:r>
+              <a:rPr lang="en-US" sz="1400" dirty="0" err="1"/>
+              <a:t>allen</a:t>
+            </a:r>
+            <a:r>
+              <a:rPr lang="en-US" sz="1400" dirty="0"/>
+              <a:t> </a:t>
+            </a:r>
+            <a:r>
+              <a:rPr lang="en-US" sz="1400" dirty="0" err="1"/>
+              <a:t>vorherigen</a:t>
+            </a:r>
+            <a:r>
+              <a:rPr lang="en-US" sz="1400" dirty="0"/>
+              <a:t> </a:t>
+            </a:r>
+            <a:r>
+              <a:rPr lang="en-US" sz="1400" dirty="0" err="1"/>
+              <a:t>Schritten</a:t>
+            </a:r>
+            <a:endParaRPr lang="en-US" sz="1400" dirty="0"/>
+          </a:p>
+          <a:p>
+            <a:endParaRPr lang="en-US" sz="1400" dirty="0"/>
+          </a:p>
+          <a:p>
+            <a:pPr>
+              <a:buNone/>
+            </a:pPr>
+            <a:r>
+              <a:rPr lang="en-US" sz="1400" b="1" dirty="0">
                 <a:solidFill>
-                  <a:schemeClr val="bg2">
-                    <a:lumMod val="50000"/>
+                  <a:schemeClr val="accent5">
+                    <a:lumMod val="75000"/>
                   </a:schemeClr>
                 </a:solidFill>
               </a:rPr>
-              <a:t>Interaktive</a:t>
-            </a:r>
-            <a:r>
-              <a:rPr lang="en-US" sz="1400" dirty="0">
-                <a:solidFill>
-                  <a:schemeClr val="bg2">
-                    <a:lumMod val="50000"/>
-                  </a:schemeClr>
-                </a:solidFill>
-              </a:rPr>
-              <a:t> Charts</a:t>
-            </a:r>
-          </a:p>
-          <a:p>
-            <a:pPr>
-              <a:buFont typeface="Arial" panose="020B0604020202020204" pitchFamily="34" charset="0"/>
-              <a:buChar char="•"/>
-            </a:pPr>
-            <a:endParaRPr lang="en-US" sz="1400" dirty="0">
-              <a:solidFill>
-                <a:schemeClr val="bg2">
-                  <a:lumMod val="50000"/>
-                </a:schemeClr>
-              </a:solidFill>
-            </a:endParaRPr>
-          </a:p>
-          <a:p>
-            <a:pPr>
-              <a:buNone/>
-            </a:pPr>
-            <a:r>
-              <a:rPr lang="en-US" sz="1400" b="1" dirty="0">
-                <a:solidFill>
-                  <a:schemeClr val="bg2">
-                    <a:lumMod val="50000"/>
-                  </a:schemeClr>
-                </a:solidFill>
-              </a:rPr>
-              <a:t>Analytics-Workflow &amp; Integration</a:t>
-            </a:r>
-            <a:endParaRPr lang="en-US" sz="1400" dirty="0">
-              <a:solidFill>
-                <a:schemeClr val="bg2">
-                  <a:lumMod val="50000"/>
-                </a:schemeClr>
-              </a:solidFill>
-            </a:endParaRPr>
+              <a:t>Capstone End-to-End Projekt</a:t>
+            </a:r>
           </a:p>
           <a:p>
             <a:pPr marL="285750" indent="-285750">
@@ -8250,14 +7715,8 @@
               <a:buChar char="•"/>
             </a:pPr>
             <a:r>
-              <a:rPr lang="en-US" sz="1400" dirty="0">
-                <a:solidFill>
-                  <a:schemeClr val="bg2">
-                    <a:lumMod val="50000"/>
-                  </a:schemeClr>
-                </a:solidFill>
-              </a:rPr>
-              <a:t>Strukturierter Workflow</a:t>
+              <a:rPr lang="de-DE" sz="1400" dirty="0"/>
+              <a:t>Vollständige Analyse von der Fragestellung bis zur Präsentation</a:t>
             </a:r>
           </a:p>
           <a:p>
@@ -8266,135 +7725,8 @@
               <a:buChar char="•"/>
             </a:pPr>
             <a:r>
-              <a:rPr lang="en-US" sz="1400" dirty="0">
-                <a:solidFill>
-                  <a:schemeClr val="bg2">
-                    <a:lumMod val="50000"/>
-                  </a:schemeClr>
-                </a:solidFill>
-              </a:rPr>
-              <a:t>Mini-</a:t>
-            </a:r>
-            <a:r>
-              <a:rPr lang="en-US" sz="1400" dirty="0" err="1">
-                <a:solidFill>
-                  <a:schemeClr val="bg2">
-                    <a:lumMod val="50000"/>
-                  </a:schemeClr>
-                </a:solidFill>
-              </a:rPr>
-              <a:t>Fallbeispiele</a:t>
-            </a:r>
-            <a:r>
-              <a:rPr lang="en-US" sz="1400" dirty="0">
-                <a:solidFill>
-                  <a:schemeClr val="bg2">
-                    <a:lumMod val="50000"/>
-                  </a:schemeClr>
-                </a:solidFill>
-              </a:rPr>
-              <a:t> </a:t>
-            </a:r>
-            <a:r>
-              <a:rPr lang="en-US" sz="1400" dirty="0" err="1">
-                <a:solidFill>
-                  <a:schemeClr val="bg2">
-                    <a:lumMod val="50000"/>
-                  </a:schemeClr>
-                </a:solidFill>
-              </a:rPr>
-              <a:t>mit</a:t>
-            </a:r>
-            <a:r>
-              <a:rPr lang="en-US" sz="1400" dirty="0">
-                <a:solidFill>
-                  <a:schemeClr val="bg2">
-                    <a:lumMod val="50000"/>
-                  </a:schemeClr>
-                </a:solidFill>
-              </a:rPr>
-              <a:t> </a:t>
-            </a:r>
-            <a:r>
-              <a:rPr lang="en-US" sz="1400" dirty="0" err="1">
-                <a:solidFill>
-                  <a:schemeClr val="bg2">
-                    <a:lumMod val="50000"/>
-                  </a:schemeClr>
-                </a:solidFill>
-              </a:rPr>
-              <a:t>allen</a:t>
-            </a:r>
-            <a:r>
-              <a:rPr lang="en-US" sz="1400" dirty="0">
-                <a:solidFill>
-                  <a:schemeClr val="bg2">
-                    <a:lumMod val="50000"/>
-                  </a:schemeClr>
-                </a:solidFill>
-              </a:rPr>
-              <a:t> </a:t>
-            </a:r>
-            <a:r>
-              <a:rPr lang="en-US" sz="1400" dirty="0" err="1">
-                <a:solidFill>
-                  <a:schemeClr val="bg2">
-                    <a:lumMod val="50000"/>
-                  </a:schemeClr>
-                </a:solidFill>
-              </a:rPr>
-              <a:t>vorherigen</a:t>
-            </a:r>
-            <a:r>
-              <a:rPr lang="en-US" sz="1400" dirty="0">
-                <a:solidFill>
-                  <a:schemeClr val="bg2">
-                    <a:lumMod val="50000"/>
-                  </a:schemeClr>
-                </a:solidFill>
-              </a:rPr>
-              <a:t> </a:t>
-            </a:r>
-            <a:r>
-              <a:rPr lang="en-US" sz="1400" dirty="0" err="1">
-                <a:solidFill>
-                  <a:schemeClr val="bg2">
-                    <a:lumMod val="50000"/>
-                  </a:schemeClr>
-                </a:solidFill>
-              </a:rPr>
-              <a:t>Schritten</a:t>
-            </a:r>
-            <a:endParaRPr lang="en-US" sz="1400" dirty="0">
-              <a:solidFill>
-                <a:schemeClr val="bg2">
-                  <a:lumMod val="50000"/>
-                </a:schemeClr>
-              </a:solidFill>
-            </a:endParaRPr>
-          </a:p>
-          <a:p>
-            <a:endParaRPr lang="en-US" sz="1400" dirty="0">
-              <a:solidFill>
-                <a:schemeClr val="bg2">
-                  <a:lumMod val="50000"/>
-                </a:schemeClr>
-              </a:solidFill>
-            </a:endParaRPr>
-          </a:p>
-          <a:p>
-            <a:pPr>
-              <a:buNone/>
-            </a:pPr>
-            <a:r>
-              <a:rPr lang="en-US" sz="1400" b="1" dirty="0">
-                <a:solidFill>
-                  <a:schemeClr val="bg2">
-                    <a:lumMod val="50000"/>
-                  </a:schemeClr>
-                </a:solidFill>
-              </a:rPr>
-              <a:t>Capstone End-to-End Projekt</a:t>
+              <a:rPr lang="de-DE" sz="1400" dirty="0"/>
+              <a:t>Alle erlernten Schritte anwenden</a:t>
             </a:r>
           </a:p>
           <a:p>
@@ -8403,51 +7735,13 @@
               <a:buChar char="•"/>
             </a:pPr>
             <a:r>
-              <a:rPr lang="de-DE" sz="1400" dirty="0">
-                <a:solidFill>
-                  <a:schemeClr val="bg2">
-                    <a:lumMod val="50000"/>
-                  </a:schemeClr>
-                </a:solidFill>
-              </a:rPr>
-              <a:t>Vollständige Analyse von der Fragestellung bis zur Präsentation</a:t>
-            </a:r>
-          </a:p>
-          <a:p>
-            <a:pPr marL="285750" indent="-285750">
-              <a:buFont typeface="Arial" panose="020B0604020202020204" pitchFamily="34" charset="0"/>
-              <a:buChar char="•"/>
-            </a:pPr>
-            <a:r>
-              <a:rPr lang="de-DE" sz="1400" dirty="0">
-                <a:solidFill>
-                  <a:schemeClr val="bg2">
-                    <a:lumMod val="50000"/>
-                  </a:schemeClr>
-                </a:solidFill>
-              </a:rPr>
-              <a:t>Alle erlernten Schritte anwenden</a:t>
-            </a:r>
-          </a:p>
-          <a:p>
-            <a:pPr marL="285750" indent="-285750">
-              <a:buFont typeface="Arial" panose="020B0604020202020204" pitchFamily="34" charset="0"/>
-              <a:buChar char="•"/>
-            </a:pPr>
-            <a:r>
-              <a:rPr lang="de-DE" sz="1400" dirty="0">
-                <a:solidFill>
-                  <a:schemeClr val="bg2">
-                    <a:lumMod val="50000"/>
-                  </a:schemeClr>
-                </a:solidFill>
-              </a:rPr>
+              <a:rPr lang="de-DE" sz="1400" dirty="0"/>
               <a:t>Ergebnisse präsentieren &amp; diskutieren</a:t>
             </a:r>
             <a:endParaRPr lang="en-US" sz="1400" dirty="0">
               <a:solidFill>
-                <a:schemeClr val="bg2">
-                  <a:lumMod val="50000"/>
+                <a:schemeClr val="accent5">
+                  <a:lumMod val="75000"/>
                 </a:schemeClr>
               </a:solidFill>
             </a:endParaRPr>
@@ -8459,7 +7753,7 @@
           <p:cNvPr id="22" name="TextBox 21">
             <a:extLst>
               <a:ext uri="{FF2B5EF4-FFF2-40B4-BE49-F238E27FC236}">
-                <a16:creationId xmlns:a16="http://schemas.microsoft.com/office/drawing/2014/main" id="{770F3F48-1ADF-1153-E69E-047C833FAC72}"/>
+                <a16:creationId xmlns:a16="http://schemas.microsoft.com/office/drawing/2014/main" id="{0D743A43-C486-7277-C9B5-214836C9B4EA}"/>
               </a:ext>
             </a:extLst>
           </p:cNvPr>
@@ -8511,7 +7805,7 @@
           <p:cNvPr id="2" name="Rectangle: Rounded Corners 1">
             <a:extLst>
               <a:ext uri="{FF2B5EF4-FFF2-40B4-BE49-F238E27FC236}">
-                <a16:creationId xmlns:a16="http://schemas.microsoft.com/office/drawing/2014/main" id="{C0664748-5797-6CF8-68A4-FA9290CD6F1B}"/>
+                <a16:creationId xmlns:a16="http://schemas.microsoft.com/office/drawing/2014/main" id="{A2E62FFF-7DFA-25F7-F3C4-D55C704ECEED}"/>
               </a:ext>
             </a:extLst>
           </p:cNvPr>
@@ -8520,8 +7814,8 @@
         </p:nvSpPr>
         <p:spPr>
           <a:xfrm>
-            <a:off x="5730475" y="2191761"/>
-            <a:ext cx="5737625" cy="1046739"/>
+            <a:off x="5730475" y="3117669"/>
+            <a:ext cx="5991262" cy="1219200"/>
           </a:xfrm>
           <a:prstGeom prst="roundRect">
             <a:avLst/>
@@ -8563,7 +7857,7 @@
     </p:spTree>
     <p:extLst>
       <p:ext uri="{BB962C8B-B14F-4D97-AF65-F5344CB8AC3E}">
-        <p14:creationId xmlns:p14="http://schemas.microsoft.com/office/powerpoint/2010/main" val="3285686356"/>
+        <p14:creationId xmlns:p14="http://schemas.microsoft.com/office/powerpoint/2010/main" val="1121179437"/>
       </p:ext>
     </p:extLst>
   </p:cSld>
@@ -8581,7 +7875,7 @@
         <p:cNvPr id="1" name="">
           <a:extLst>
             <a:ext uri="{FF2B5EF4-FFF2-40B4-BE49-F238E27FC236}">
-              <a16:creationId xmlns:a16="http://schemas.microsoft.com/office/drawing/2014/main" id="{2F6E5BA4-A7B8-ECE0-9DD6-5895BFFA2C18}"/>
+              <a16:creationId xmlns:a16="http://schemas.microsoft.com/office/drawing/2014/main" id="{6E33F5CE-1224-48F0-91AD-0C4893003DD6}"/>
             </a:ext>
           </a:extLst>
         </p:cNvPr>
@@ -8601,7 +7895,7 @@
           <p:cNvPr id="2" name="Rectangle: Rounded Corners 1">
             <a:extLst>
               <a:ext uri="{FF2B5EF4-FFF2-40B4-BE49-F238E27FC236}">
-                <a16:creationId xmlns:a16="http://schemas.microsoft.com/office/drawing/2014/main" id="{6D7FF911-75F1-6CF4-7647-9BF769A2352A}"/>
+                <a16:creationId xmlns:a16="http://schemas.microsoft.com/office/drawing/2014/main" id="{FC85E546-ABE1-A174-E125-ED55D6EE43B0}"/>
               </a:ext>
             </a:extLst>
           </p:cNvPr>
@@ -8653,7 +7947,7 @@
           <p:cNvPr id="3" name="Graphic 2" descr="Research">
             <a:extLst>
               <a:ext uri="{FF2B5EF4-FFF2-40B4-BE49-F238E27FC236}">
-                <a16:creationId xmlns:a16="http://schemas.microsoft.com/office/drawing/2014/main" id="{ED97073E-4087-3C9E-F656-F669F9C38017}"/>
+                <a16:creationId xmlns:a16="http://schemas.microsoft.com/office/drawing/2014/main" id="{6248855C-17F2-68F3-B8E9-C1BC4F488875}"/>
               </a:ext>
             </a:extLst>
           </p:cNvPr>
@@ -8689,7 +7983,7 @@
           <p:cNvPr id="4" name="TextBox 3">
             <a:extLst>
               <a:ext uri="{FF2B5EF4-FFF2-40B4-BE49-F238E27FC236}">
-                <a16:creationId xmlns:a16="http://schemas.microsoft.com/office/drawing/2014/main" id="{00B0EE23-FD6A-5E99-342A-7D807E549D85}"/>
+                <a16:creationId xmlns:a16="http://schemas.microsoft.com/office/drawing/2014/main" id="{3693C570-C12F-3563-963A-9645BFE322D1}"/>
               </a:ext>
             </a:extLst>
           </p:cNvPr>
@@ -8755,254 +8049,118 @@
           </a:p>
         </p:txBody>
       </p:sp>
-      <p:sp>
-        <p:nvSpPr>
-          <p:cNvPr id="11" name="TextBox 10">
-            <a:extLst>
-              <a:ext uri="{FF2B5EF4-FFF2-40B4-BE49-F238E27FC236}">
-                <a16:creationId xmlns:a16="http://schemas.microsoft.com/office/drawing/2014/main" id="{D74F1C15-32DF-DBC6-7323-E15A034C04F0}"/>
-              </a:ext>
-            </a:extLst>
-          </p:cNvPr>
-          <p:cNvSpPr txBox="1"/>
+      <p:pic>
+        <p:nvPicPr>
+          <p:cNvPr id="7" name="Graphic 6">
+            <a:extLst>
+              <a:ext uri="{FF2B5EF4-FFF2-40B4-BE49-F238E27FC236}">
+                <a16:creationId xmlns:a16="http://schemas.microsoft.com/office/drawing/2014/main" id="{408156DC-9F94-3BE8-713F-BF8B4C633A4B}"/>
+              </a:ext>
+            </a:extLst>
+          </p:cNvPr>
+          <p:cNvPicPr>
+            <a:picLocks noChangeAspect="1"/>
+          </p:cNvPicPr>
           <p:nvPr/>
-        </p:nvSpPr>
+        </p:nvPicPr>
+        <p:blipFill>
+          <a:blip r:embed="rId5">
+            <a:extLst>
+              <a:ext uri="{96DAC541-7B7A-43D3-8B79-37D633B846F1}">
+                <asvg:svgBlip xmlns:asvg="http://schemas.microsoft.com/office/drawing/2016/SVG/main" r:embed="rId6"/>
+              </a:ext>
+            </a:extLst>
+          </a:blip>
+          <a:stretch>
+            <a:fillRect/>
+          </a:stretch>
+        </p:blipFill>
         <p:spPr>
           <a:xfrm>
-            <a:off x="4276299" y="876606"/>
-            <a:ext cx="7032629" cy="5632311"/>
+            <a:off x="3232181" y="1471297"/>
+            <a:ext cx="8315386" cy="778216"/>
           </a:xfrm>
           <a:prstGeom prst="rect">
             <a:avLst/>
           </a:prstGeom>
-          <a:noFill/>
         </p:spPr>
-        <p:txBody>
-          <a:bodyPr wrap="square">
-            <a:spAutoFit/>
-          </a:bodyPr>
-          <a:lstStyle/>
-          <a:p>
-            <a:r>
-              <a:rPr lang="en-US" b="1" dirty="0" err="1"/>
-              <a:t>Lageparameter</a:t>
-            </a:r>
-            <a:r>
-              <a:rPr lang="en-US" b="1" dirty="0"/>
-              <a:t> (</a:t>
-            </a:r>
-            <a:r>
-              <a:rPr lang="en-US" b="1" dirty="0" err="1"/>
-              <a:t>Maße</a:t>
-            </a:r>
-            <a:r>
-              <a:rPr lang="en-US" b="1" dirty="0"/>
-              <a:t> der </a:t>
-            </a:r>
-            <a:r>
-              <a:rPr lang="en-US" b="1" dirty="0" err="1"/>
-              <a:t>zentralen</a:t>
-            </a:r>
-            <a:r>
-              <a:rPr lang="en-US" b="1" dirty="0"/>
-              <a:t> Tendenz)</a:t>
-            </a:r>
-          </a:p>
-          <a:p>
-            <a:endParaRPr lang="en-US" b="1" dirty="0"/>
-          </a:p>
-          <a:p>
-            <a:r>
-              <a:rPr lang="de-DE" dirty="0"/>
-              <a:t>Welche Zahl zeigt eine Liste von Zahlen am besten an?</a:t>
-            </a:r>
-          </a:p>
-          <a:p>
-            <a:r>
-              <a:rPr lang="en-US" dirty="0"/>
-              <a:t>[3,4,5]</a:t>
-            </a:r>
-          </a:p>
-          <a:p>
-            <a:endParaRPr lang="en-US" dirty="0"/>
-          </a:p>
-          <a:p>
-            <a:endParaRPr lang="en-US" dirty="0"/>
-          </a:p>
-          <a:p>
-            <a:r>
-              <a:rPr lang="de-DE" dirty="0"/>
-              <a:t>Der Abstand von a zu b kann als a−b berechnet werden, </a:t>
-            </a:r>
-          </a:p>
-          <a:p>
-            <a:endParaRPr lang="de-DE" dirty="0"/>
-          </a:p>
-          <a:p>
-            <a:r>
-              <a:rPr lang="de-DE" dirty="0"/>
-              <a:t>oder (a−b)² um ihn zu vergrößern</a:t>
-            </a:r>
-          </a:p>
-          <a:p>
-            <a:endParaRPr lang="de-DE" dirty="0"/>
-          </a:p>
-          <a:p>
-            <a:r>
-              <a:rPr lang="de-DE" dirty="0"/>
-              <a:t>Und der Abstand einer Zahl zur Liste ist die Summe der Abstände zu jedem Element.</a:t>
-            </a:r>
-          </a:p>
-          <a:p>
-            <a:endParaRPr lang="en-US" dirty="0"/>
-          </a:p>
-          <a:p>
-            <a:r>
-              <a:rPr lang="en-US" b="1" dirty="0" err="1"/>
-              <a:t>Beispiel</a:t>
-            </a:r>
-            <a:r>
-              <a:rPr lang="en-US" b="1" dirty="0"/>
-              <a:t>: 4 und [3,4,5]</a:t>
-            </a:r>
-          </a:p>
-          <a:p>
-            <a:r>
-              <a:rPr lang="en-US" dirty="0"/>
-              <a:t>(4-3)**2 = 1**2 = 1</a:t>
-            </a:r>
-          </a:p>
-          <a:p>
-            <a:r>
-              <a:rPr lang="en-US" dirty="0"/>
-              <a:t>(4-4)**2 = 0 **2 = 0</a:t>
-            </a:r>
-          </a:p>
-          <a:p>
-            <a:r>
-              <a:rPr lang="en-US" dirty="0"/>
-              <a:t>(4-5)**2 = (-1)**2 = 1</a:t>
-            </a:r>
-          </a:p>
-          <a:p>
-            <a:r>
-              <a:rPr lang="en-US" dirty="0"/>
-              <a:t>Sum= 1+0+1 = 2</a:t>
-            </a:r>
-          </a:p>
-          <a:p>
-            <a:endParaRPr lang="en-US" dirty="0"/>
-          </a:p>
-          <a:p>
-            <a:endParaRPr lang="en-US" dirty="0"/>
-          </a:p>
-        </p:txBody>
-      </p:sp>
-      <p:sp>
-        <p:nvSpPr>
-          <p:cNvPr id="6" name="TextBox 5">
-            <a:extLst>
-              <a:ext uri="{FF2B5EF4-FFF2-40B4-BE49-F238E27FC236}">
-                <a16:creationId xmlns:a16="http://schemas.microsoft.com/office/drawing/2014/main" id="{99097812-1778-1DF7-D71B-C96CCBFF0F4D}"/>
-              </a:ext>
-            </a:extLst>
-          </p:cNvPr>
-          <p:cNvSpPr txBox="1"/>
+      </p:pic>
+      <p:pic>
+        <p:nvPicPr>
+          <p:cNvPr id="22" name="Picture 21">
+            <a:extLst>
+              <a:ext uri="{FF2B5EF4-FFF2-40B4-BE49-F238E27FC236}">
+                <a16:creationId xmlns:a16="http://schemas.microsoft.com/office/drawing/2014/main" id="{E0DF2D89-D1E3-5317-FC14-567364DBD9D1}"/>
+              </a:ext>
+            </a:extLst>
+          </p:cNvPr>
+          <p:cNvPicPr>
+            <a:picLocks noChangeAspect="1"/>
+          </p:cNvPicPr>
           <p:nvPr/>
-        </p:nvSpPr>
+        </p:nvPicPr>
+        <p:blipFill>
+          <a:blip r:embed="rId7">
+            <a:extLst>
+              <a:ext uri="{28A0092B-C50C-407E-A947-70E740481C1C}">
+                <a14:useLocalDpi xmlns:a14="http://schemas.microsoft.com/office/drawing/2010/main" val="0"/>
+              </a:ext>
+            </a:extLst>
+          </a:blip>
+          <a:stretch>
+            <a:fillRect/>
+          </a:stretch>
+        </p:blipFill>
         <p:spPr>
           <a:xfrm>
-            <a:off x="7042484" y="4465468"/>
-            <a:ext cx="3144253" cy="1477328"/>
+            <a:off x="4579153" y="2759363"/>
+            <a:ext cx="3033694" cy="2639314"/>
           </a:xfrm>
           <a:prstGeom prst="rect">
             <a:avLst/>
           </a:prstGeom>
-          <a:noFill/>
         </p:spPr>
-        <p:txBody>
-          <a:bodyPr wrap="square">
-            <a:spAutoFit/>
-          </a:bodyPr>
-          <a:lstStyle/>
-          <a:p>
-            <a:r>
-              <a:rPr lang="en-US" b="1" dirty="0" err="1"/>
-              <a:t>Beispiel</a:t>
-            </a:r>
-            <a:r>
-              <a:rPr lang="en-US" b="1" dirty="0"/>
-              <a:t>: 7 und [3,4,5]</a:t>
-            </a:r>
-          </a:p>
-          <a:p>
-            <a:r>
-              <a:rPr lang="en-US" dirty="0"/>
-              <a:t>(7-3)**2 = 4**2 = 16</a:t>
-            </a:r>
-          </a:p>
-          <a:p>
-            <a:r>
-              <a:rPr lang="en-US" dirty="0"/>
-              <a:t>(7-4)**2 = 3 **2 = 9</a:t>
-            </a:r>
-          </a:p>
-          <a:p>
-            <a:r>
-              <a:rPr lang="en-US" dirty="0"/>
-              <a:t>(7-5)**2 = (2)**2 = 4</a:t>
-            </a:r>
-          </a:p>
-          <a:p>
-            <a:r>
-              <a:rPr lang="en-US" dirty="0"/>
-              <a:t>Sum= 16+9+4 = 29</a:t>
-            </a:r>
-          </a:p>
-        </p:txBody>
-      </p:sp>
-      <p:sp>
-        <p:nvSpPr>
-          <p:cNvPr id="8" name="TextBox 7">
-            <a:extLst>
-              <a:ext uri="{FF2B5EF4-FFF2-40B4-BE49-F238E27FC236}">
-                <a16:creationId xmlns:a16="http://schemas.microsoft.com/office/drawing/2014/main" id="{3DB07762-8A0C-6C1F-FBD2-EC00545A9578}"/>
-              </a:ext>
-            </a:extLst>
-          </p:cNvPr>
-          <p:cNvSpPr txBox="1"/>
+      </p:pic>
+      <p:pic>
+        <p:nvPicPr>
+          <p:cNvPr id="26" name="Picture 25">
+            <a:extLst>
+              <a:ext uri="{FF2B5EF4-FFF2-40B4-BE49-F238E27FC236}">
+                <a16:creationId xmlns:a16="http://schemas.microsoft.com/office/drawing/2014/main" id="{55DF77EE-3802-BE05-F94C-B55DC6E09533}"/>
+              </a:ext>
+            </a:extLst>
+          </p:cNvPr>
+          <p:cNvPicPr>
+            <a:picLocks noChangeAspect="1"/>
+          </p:cNvPicPr>
           <p:nvPr/>
-        </p:nvSpPr>
+        </p:nvPicPr>
+        <p:blipFill>
+          <a:blip r:embed="rId8">
+            <a:extLst>
+              <a:ext uri="{28A0092B-C50C-407E-A947-70E740481C1C}">
+                <a14:useLocalDpi xmlns:a14="http://schemas.microsoft.com/office/drawing/2010/main" val="0"/>
+              </a:ext>
+            </a:extLst>
+          </a:blip>
+          <a:stretch>
+            <a:fillRect/>
+          </a:stretch>
+        </p:blipFill>
         <p:spPr>
           <a:xfrm>
-            <a:off x="4507831" y="6324250"/>
-            <a:ext cx="5069306" cy="369332"/>
+            <a:off x="7808670" y="2626630"/>
+            <a:ext cx="3121152" cy="2865120"/>
           </a:xfrm>
           <a:prstGeom prst="rect">
             <a:avLst/>
           </a:prstGeom>
-          <a:noFill/>
         </p:spPr>
-        <p:txBody>
-          <a:bodyPr wrap="square">
-            <a:spAutoFit/>
-          </a:bodyPr>
-          <a:lstStyle/>
-          <a:p>
-            <a:pPr>
-              <a:buNone/>
-            </a:pPr>
-            <a:r>
-              <a:rPr lang="de-DE" dirty="0"/>
-              <a:t>4 ist repräsentativer als 7.</a:t>
-            </a:r>
-          </a:p>
-        </p:txBody>
-      </p:sp>
+      </p:pic>
     </p:spTree>
     <p:extLst>
       <p:ext uri="{BB962C8B-B14F-4D97-AF65-F5344CB8AC3E}">
-        <p14:creationId xmlns:p14="http://schemas.microsoft.com/office/powerpoint/2010/main" val="3151162091"/>
+        <p14:creationId xmlns:p14="http://schemas.microsoft.com/office/powerpoint/2010/main" val="296407419"/>
       </p:ext>
     </p:extLst>
   </p:cSld>
@@ -9020,7 +8178,7 @@
         <p:cNvPr id="1" name="">
           <a:extLst>
             <a:ext uri="{FF2B5EF4-FFF2-40B4-BE49-F238E27FC236}">
-              <a16:creationId xmlns:a16="http://schemas.microsoft.com/office/drawing/2014/main" id="{57C894E7-4DE9-2778-C260-C66E04B8B933}"/>
+              <a16:creationId xmlns:a16="http://schemas.microsoft.com/office/drawing/2014/main" id="{0CB9E962-770B-BACC-F8A5-4EB662C8B847}"/>
             </a:ext>
           </a:extLst>
         </p:cNvPr>
@@ -9040,7 +8198,7 @@
           <p:cNvPr id="2" name="Rectangle: Rounded Corners 1">
             <a:extLst>
               <a:ext uri="{FF2B5EF4-FFF2-40B4-BE49-F238E27FC236}">
-                <a16:creationId xmlns:a16="http://schemas.microsoft.com/office/drawing/2014/main" id="{6D26E44B-FB85-492C-A529-E16CF0CD3C1D}"/>
+                <a16:creationId xmlns:a16="http://schemas.microsoft.com/office/drawing/2014/main" id="{B00AB94D-7287-DF93-F98E-FFD9E2C8862D}"/>
               </a:ext>
             </a:extLst>
           </p:cNvPr>
@@ -9092,7 +8250,7 @@
           <p:cNvPr id="3" name="Graphic 2" descr="Research">
             <a:extLst>
               <a:ext uri="{FF2B5EF4-FFF2-40B4-BE49-F238E27FC236}">
-                <a16:creationId xmlns:a16="http://schemas.microsoft.com/office/drawing/2014/main" id="{CFEB8550-ACF6-5E82-E5E5-978373BC5E24}"/>
+                <a16:creationId xmlns:a16="http://schemas.microsoft.com/office/drawing/2014/main" id="{B27A22E4-3CB7-0EC8-9C4C-2A10C0AEF0EC}"/>
               </a:ext>
             </a:extLst>
           </p:cNvPr>
@@ -9128,7 +8286,7 @@
           <p:cNvPr id="4" name="TextBox 3">
             <a:extLst>
               <a:ext uri="{FF2B5EF4-FFF2-40B4-BE49-F238E27FC236}">
-                <a16:creationId xmlns:a16="http://schemas.microsoft.com/office/drawing/2014/main" id="{7627BADB-E707-23EB-D9A0-5A94FD74A991}"/>
+                <a16:creationId xmlns:a16="http://schemas.microsoft.com/office/drawing/2014/main" id="{D88026C3-EF7E-1F11-0D72-E084A8961938}"/>
               </a:ext>
             </a:extLst>
           </p:cNvPr>
@@ -9194,254 +8352,46 @@
           </a:p>
         </p:txBody>
       </p:sp>
-      <p:sp>
-        <p:nvSpPr>
-          <p:cNvPr id="11" name="TextBox 10">
-            <a:extLst>
-              <a:ext uri="{FF2B5EF4-FFF2-40B4-BE49-F238E27FC236}">
-                <a16:creationId xmlns:a16="http://schemas.microsoft.com/office/drawing/2014/main" id="{62777E6E-6500-352C-54CF-B43EF00D29F5}"/>
-              </a:ext>
-            </a:extLst>
-          </p:cNvPr>
-          <p:cNvSpPr txBox="1"/>
+      <p:pic>
+        <p:nvPicPr>
+          <p:cNvPr id="9" name="Picture 8">
+            <a:extLst>
+              <a:ext uri="{FF2B5EF4-FFF2-40B4-BE49-F238E27FC236}">
+                <a16:creationId xmlns:a16="http://schemas.microsoft.com/office/drawing/2014/main" id="{8F3E8324-303F-260C-8804-DB731948C5B6}"/>
+              </a:ext>
+            </a:extLst>
+          </p:cNvPr>
+          <p:cNvPicPr>
+            <a:picLocks noChangeAspect="1"/>
+          </p:cNvPicPr>
           <p:nvPr/>
-        </p:nvSpPr>
+        </p:nvPicPr>
+        <p:blipFill>
+          <a:blip r:embed="rId5">
+            <a:extLst>
+              <a:ext uri="{28A0092B-C50C-407E-A947-70E740481C1C}">
+                <a14:useLocalDpi xmlns:a14="http://schemas.microsoft.com/office/drawing/2010/main" val="0"/>
+              </a:ext>
+            </a:extLst>
+          </a:blip>
+          <a:stretch>
+            <a:fillRect/>
+          </a:stretch>
+        </p:blipFill>
         <p:spPr>
           <a:xfrm>
-            <a:off x="4276299" y="876606"/>
-            <a:ext cx="7032629" cy="5632311"/>
+            <a:off x="3526933" y="114299"/>
+            <a:ext cx="6858000" cy="6858000"/>
           </a:xfrm>
           <a:prstGeom prst="rect">
             <a:avLst/>
           </a:prstGeom>
-          <a:noFill/>
         </p:spPr>
-        <p:txBody>
-          <a:bodyPr wrap="square">
-            <a:spAutoFit/>
-          </a:bodyPr>
-          <a:lstStyle/>
-          <a:p>
-            <a:r>
-              <a:rPr lang="en-US" b="1" dirty="0" err="1"/>
-              <a:t>Lageparameter</a:t>
-            </a:r>
-            <a:r>
-              <a:rPr lang="en-US" b="1" dirty="0"/>
-              <a:t> (</a:t>
-            </a:r>
-            <a:r>
-              <a:rPr lang="en-US" b="1" dirty="0" err="1"/>
-              <a:t>Maße</a:t>
-            </a:r>
-            <a:r>
-              <a:rPr lang="en-US" b="1" dirty="0"/>
-              <a:t> der </a:t>
-            </a:r>
-            <a:r>
-              <a:rPr lang="en-US" b="1" dirty="0" err="1"/>
-              <a:t>zentralen</a:t>
-            </a:r>
-            <a:r>
-              <a:rPr lang="en-US" b="1" dirty="0"/>
-              <a:t> Tendenz)</a:t>
-            </a:r>
-          </a:p>
-          <a:p>
-            <a:endParaRPr lang="en-US" b="1" dirty="0"/>
-          </a:p>
-          <a:p>
-            <a:r>
-              <a:rPr lang="de-DE" dirty="0"/>
-              <a:t>Welche Zahl zeigt eine Liste von Zahlen am besten an?</a:t>
-            </a:r>
-          </a:p>
-          <a:p>
-            <a:r>
-              <a:rPr lang="en-US" dirty="0"/>
-              <a:t>[3,4,5]</a:t>
-            </a:r>
-          </a:p>
-          <a:p>
-            <a:endParaRPr lang="en-US" dirty="0"/>
-          </a:p>
-          <a:p>
-            <a:endParaRPr lang="en-US" dirty="0"/>
-          </a:p>
-          <a:p>
-            <a:r>
-              <a:rPr lang="de-DE" dirty="0"/>
-              <a:t>Der Abstand von a zu b kann als |a−b| berechnet werden (1-norm), </a:t>
-            </a:r>
-          </a:p>
-          <a:p>
-            <a:endParaRPr lang="de-DE" dirty="0"/>
-          </a:p>
-          <a:p>
-            <a:r>
-              <a:rPr lang="de-DE" dirty="0"/>
-              <a:t>oder (a−b)² um ihn zu vergrößern (2-norm)</a:t>
-            </a:r>
-          </a:p>
-          <a:p>
-            <a:endParaRPr lang="de-DE" dirty="0"/>
-          </a:p>
-          <a:p>
-            <a:r>
-              <a:rPr lang="de-DE" dirty="0"/>
-              <a:t>Und der Abstand einer Zahl zur Liste ist die Summe der Abstände zu jedem Element.</a:t>
-            </a:r>
-          </a:p>
-          <a:p>
-            <a:endParaRPr lang="en-US" dirty="0"/>
-          </a:p>
-          <a:p>
-            <a:r>
-              <a:rPr lang="en-US" b="1" dirty="0" err="1"/>
-              <a:t>Beispiel</a:t>
-            </a:r>
-            <a:r>
-              <a:rPr lang="en-US" b="1" dirty="0"/>
-              <a:t>: 4 und [3,4,5]</a:t>
-            </a:r>
-          </a:p>
-          <a:p>
-            <a:r>
-              <a:rPr lang="en-US" dirty="0"/>
-              <a:t>(4-3)**2 = 1**2 = 1</a:t>
-            </a:r>
-          </a:p>
-          <a:p>
-            <a:r>
-              <a:rPr lang="en-US" dirty="0"/>
-              <a:t>(4-4)**2 = 0 **2 = 0</a:t>
-            </a:r>
-          </a:p>
-          <a:p>
-            <a:r>
-              <a:rPr lang="en-US" dirty="0"/>
-              <a:t>(4-5)**2 = (-1)**2 = 1</a:t>
-            </a:r>
-          </a:p>
-          <a:p>
-            <a:r>
-              <a:rPr lang="en-US" dirty="0"/>
-              <a:t>Sum= 1+0+1 = 2</a:t>
-            </a:r>
-          </a:p>
-          <a:p>
-            <a:endParaRPr lang="en-US" dirty="0"/>
-          </a:p>
-          <a:p>
-            <a:endParaRPr lang="en-US" dirty="0"/>
-          </a:p>
-        </p:txBody>
-      </p:sp>
-      <p:sp>
-        <p:nvSpPr>
-          <p:cNvPr id="6" name="TextBox 5">
-            <a:extLst>
-              <a:ext uri="{FF2B5EF4-FFF2-40B4-BE49-F238E27FC236}">
-                <a16:creationId xmlns:a16="http://schemas.microsoft.com/office/drawing/2014/main" id="{C34F8599-6D7C-3977-3B9B-2EA7851B5073}"/>
-              </a:ext>
-            </a:extLst>
-          </p:cNvPr>
-          <p:cNvSpPr txBox="1"/>
-          <p:nvPr/>
-        </p:nvSpPr>
-        <p:spPr>
-          <a:xfrm>
-            <a:off x="7042484" y="4465468"/>
-            <a:ext cx="3144253" cy="1477328"/>
-          </a:xfrm>
-          <a:prstGeom prst="rect">
-            <a:avLst/>
-          </a:prstGeom>
-          <a:noFill/>
-        </p:spPr>
-        <p:txBody>
-          <a:bodyPr wrap="square">
-            <a:spAutoFit/>
-          </a:bodyPr>
-          <a:lstStyle/>
-          <a:p>
-            <a:r>
-              <a:rPr lang="en-US" b="1" dirty="0" err="1"/>
-              <a:t>Beispiel</a:t>
-            </a:r>
-            <a:r>
-              <a:rPr lang="en-US" b="1" dirty="0"/>
-              <a:t>: 7 und [3,4,5]</a:t>
-            </a:r>
-          </a:p>
-          <a:p>
-            <a:r>
-              <a:rPr lang="en-US" dirty="0"/>
-              <a:t>(7-3)**2 = 4**2 = 16</a:t>
-            </a:r>
-          </a:p>
-          <a:p>
-            <a:r>
-              <a:rPr lang="en-US" dirty="0"/>
-              <a:t>(7-4)**2 = 3 **2 = 9</a:t>
-            </a:r>
-          </a:p>
-          <a:p>
-            <a:r>
-              <a:rPr lang="en-US" dirty="0"/>
-              <a:t>(7-5)**2 = (2)**2 = 4</a:t>
-            </a:r>
-          </a:p>
-          <a:p>
-            <a:r>
-              <a:rPr lang="en-US" dirty="0"/>
-              <a:t>Sum= 16+9+4 = 29</a:t>
-            </a:r>
-          </a:p>
-        </p:txBody>
-      </p:sp>
-      <p:sp>
-        <p:nvSpPr>
-          <p:cNvPr id="8" name="TextBox 7">
-            <a:extLst>
-              <a:ext uri="{FF2B5EF4-FFF2-40B4-BE49-F238E27FC236}">
-                <a16:creationId xmlns:a16="http://schemas.microsoft.com/office/drawing/2014/main" id="{0A03A9BD-53DA-BD36-5354-09BFAF94C63B}"/>
-              </a:ext>
-            </a:extLst>
-          </p:cNvPr>
-          <p:cNvSpPr txBox="1"/>
-          <p:nvPr/>
-        </p:nvSpPr>
-        <p:spPr>
-          <a:xfrm>
-            <a:off x="4276299" y="6041190"/>
-            <a:ext cx="5069306" cy="369332"/>
-          </a:xfrm>
-          <a:prstGeom prst="rect">
-            <a:avLst/>
-          </a:prstGeom>
-          <a:noFill/>
-        </p:spPr>
-        <p:txBody>
-          <a:bodyPr wrap="square">
-            <a:spAutoFit/>
-          </a:bodyPr>
-          <a:lstStyle/>
-          <a:p>
-            <a:pPr>
-              <a:buNone/>
-            </a:pPr>
-            <a:r>
-              <a:rPr lang="de-DE" b="1" dirty="0"/>
-              <a:t>4 ist repräsentativer als 7.</a:t>
-            </a:r>
-          </a:p>
-        </p:txBody>
-      </p:sp>
+      </p:pic>
     </p:spTree>
     <p:extLst>
       <p:ext uri="{BB962C8B-B14F-4D97-AF65-F5344CB8AC3E}">
-        <p14:creationId xmlns:p14="http://schemas.microsoft.com/office/powerpoint/2010/main" val="3516210469"/>
+        <p14:creationId xmlns:p14="http://schemas.microsoft.com/office/powerpoint/2010/main" val="920336309"/>
       </p:ext>
     </p:extLst>
   </p:cSld>
@@ -9459,7 +8409,7 @@
         <p:cNvPr id="1" name="">
           <a:extLst>
             <a:ext uri="{FF2B5EF4-FFF2-40B4-BE49-F238E27FC236}">
-              <a16:creationId xmlns:a16="http://schemas.microsoft.com/office/drawing/2014/main" id="{85DB4242-0FB4-61D2-A2FE-D8564A820AA8}"/>
+              <a16:creationId xmlns:a16="http://schemas.microsoft.com/office/drawing/2014/main" id="{88D508F6-9129-BB6F-D460-CED42DBAC0AC}"/>
             </a:ext>
           </a:extLst>
         </p:cNvPr>
@@ -9479,7 +8429,7 @@
           <p:cNvPr id="2" name="Rectangle: Rounded Corners 1">
             <a:extLst>
               <a:ext uri="{FF2B5EF4-FFF2-40B4-BE49-F238E27FC236}">
-                <a16:creationId xmlns:a16="http://schemas.microsoft.com/office/drawing/2014/main" id="{D8098266-5FB2-953B-3702-EDCC87301E19}"/>
+                <a16:creationId xmlns:a16="http://schemas.microsoft.com/office/drawing/2014/main" id="{59CD4DDF-8CB7-D73B-C912-1E35C81B2AA9}"/>
               </a:ext>
             </a:extLst>
           </p:cNvPr>
@@ -9531,7 +8481,7 @@
           <p:cNvPr id="3" name="Graphic 2" descr="Research">
             <a:extLst>
               <a:ext uri="{FF2B5EF4-FFF2-40B4-BE49-F238E27FC236}">
-                <a16:creationId xmlns:a16="http://schemas.microsoft.com/office/drawing/2014/main" id="{9FE6D9F3-DA03-73AB-8175-7D93E7C73907}"/>
+                <a16:creationId xmlns:a16="http://schemas.microsoft.com/office/drawing/2014/main" id="{C07361D0-0F7F-EDD4-6532-E49B82DC5E3B}"/>
               </a:ext>
             </a:extLst>
           </p:cNvPr>
@@ -9567,7 +8517,7 @@
           <p:cNvPr id="4" name="TextBox 3">
             <a:extLst>
               <a:ext uri="{FF2B5EF4-FFF2-40B4-BE49-F238E27FC236}">
-                <a16:creationId xmlns:a16="http://schemas.microsoft.com/office/drawing/2014/main" id="{78E6F037-78BF-82A2-9DF1-E0963B7577FF}"/>
+                <a16:creationId xmlns:a16="http://schemas.microsoft.com/office/drawing/2014/main" id="{CB6A8635-E321-1D87-B214-BFBC3362DCEE}"/>
               </a:ext>
             </a:extLst>
           </p:cNvPr>
@@ -9633,449 +8583,46 @@
           </a:p>
         </p:txBody>
       </p:sp>
-      <mc:AlternateContent xmlns:mc="http://schemas.openxmlformats.org/markup-compatibility/2006">
-        <mc:Choice xmlns:a14="http://schemas.microsoft.com/office/drawing/2010/main" Requires="a14">
-          <p:sp>
-            <p:nvSpPr>
-              <p:cNvPr id="11" name="TextBox 10">
-                <a:extLst>
-                  <a:ext uri="{FF2B5EF4-FFF2-40B4-BE49-F238E27FC236}">
-                    <a16:creationId xmlns:a16="http://schemas.microsoft.com/office/drawing/2014/main" id="{790F769F-68EB-9D5E-4C97-E3CA2CF3F8F5}"/>
-                  </a:ext>
-                </a:extLst>
-              </p:cNvPr>
-              <p:cNvSpPr txBox="1"/>
-              <p:nvPr/>
-            </p:nvSpPr>
-            <p:spPr>
-              <a:xfrm>
-                <a:off x="4245037" y="1272413"/>
-                <a:ext cx="7032629" cy="5503814"/>
-              </a:xfrm>
-              <a:prstGeom prst="rect">
-                <a:avLst/>
-              </a:prstGeom>
-              <a:noFill/>
-            </p:spPr>
-            <p:txBody>
-              <a:bodyPr wrap="square">
-                <a:spAutoFit/>
-              </a:bodyPr>
-              <a:lstStyle/>
-              <a:p>
-                <a:r>
-                  <a:rPr lang="en-US" b="1" dirty="0"/>
-                  <a:t>Lageparameter (</a:t>
-                </a:r>
-                <a:r>
-                  <a:rPr lang="en-US" b="1" dirty="0" err="1"/>
-                  <a:t>Maße</a:t>
-                </a:r>
-                <a:r>
-                  <a:rPr lang="en-US" b="1" dirty="0"/>
-                  <a:t> der </a:t>
-                </a:r>
-                <a:r>
-                  <a:rPr lang="en-US" b="1" dirty="0" err="1"/>
-                  <a:t>zentralen</a:t>
-                </a:r>
-                <a:r>
-                  <a:rPr lang="en-US" b="1" dirty="0"/>
-                  <a:t> Tendenz)</a:t>
-                </a:r>
-              </a:p>
-              <a:p>
-                <a:endParaRPr lang="en-US" b="1" dirty="0"/>
-              </a:p>
-              <a:p>
-                <a:r>
-                  <a:rPr lang="en-US" dirty="0"/>
-                  <a:t>Formula: </a:t>
-                </a:r>
-                <a14:m>
-                  <m:oMath xmlns:m="http://schemas.openxmlformats.org/officeDocument/2006/math">
-                    <m:limUpp>
-                      <m:limUppPr>
-                        <m:ctrlPr>
-                          <a:rPr lang="fa-IR" i="1">
-                            <a:latin typeface="Cambria Math" panose="02040503050406030204" pitchFamily="18" charset="0"/>
-                          </a:rPr>
-                        </m:ctrlPr>
-                      </m:limUppPr>
-                      <m:e>
-                        <m:r>
-                          <a:rPr lang="fa-IR" i="1">
-                            <a:latin typeface="Cambria Math" panose="02040503050406030204" pitchFamily="18" charset="0"/>
-                          </a:rPr>
-                          <m:t>𝑥</m:t>
-                        </m:r>
-                      </m:e>
-                      <m:lim>
-                        <m:r>
-                          <a:rPr lang="fa-IR">
-                            <a:latin typeface="Cambria Math" panose="02040503050406030204" pitchFamily="18" charset="0"/>
-                          </a:rPr>
-                          <m:t>ˉ</m:t>
-                        </m:r>
-                      </m:lim>
-                    </m:limUpp>
-                    <m:r>
-                      <a:rPr lang="fa-IR">
-                        <a:latin typeface="Cambria Math" panose="02040503050406030204" pitchFamily="18" charset="0"/>
-                      </a:rPr>
-                      <m:t>=</m:t>
-                    </m:r>
-                    <m:f>
-                      <m:fPr>
-                        <m:ctrlPr>
-                          <a:rPr lang="fa-IR" i="1">
-                            <a:latin typeface="Cambria Math" panose="02040503050406030204" pitchFamily="18" charset="0"/>
-                          </a:rPr>
-                        </m:ctrlPr>
-                      </m:fPr>
-                      <m:num>
-                        <m:nary>
-                          <m:naryPr>
-                            <m:chr m:val="∑"/>
-                            <m:grow m:val="on"/>
-                            <m:subHide m:val="on"/>
-                            <m:supHide m:val="on"/>
-                            <m:ctrlPr>
-                              <a:rPr lang="fa-IR" i="1">
-                                <a:latin typeface="Cambria Math" panose="02040503050406030204" pitchFamily="18" charset="0"/>
-                              </a:rPr>
-                            </m:ctrlPr>
-                          </m:naryPr>
-                          <m:sub/>
-                          <m:sup/>
-                          <m:e>
-                            <m:r>
-                              <a:rPr lang="fa-IR" i="1">
-                                <a:latin typeface="Cambria Math" panose="02040503050406030204" pitchFamily="18" charset="0"/>
-                              </a:rPr>
-                              <m:t>𝑥</m:t>
-                            </m:r>
-                          </m:e>
-                        </m:nary>
-                      </m:num>
-                      <m:den>
-                        <m:r>
-                          <a:rPr lang="fa-IR" i="1">
-                            <a:latin typeface="Cambria Math" panose="02040503050406030204" pitchFamily="18" charset="0"/>
-                          </a:rPr>
-                          <m:t>𝑛</m:t>
-                        </m:r>
-                      </m:den>
-                    </m:f>
-                  </m:oMath>
-                </a14:m>
-                <a:endParaRPr lang="en-US" dirty="0"/>
-              </a:p>
-              <a:p>
-                <a:br>
-                  <a:rPr lang="en-US" dirty="0"/>
-                </a:br>
-                <a:r>
-                  <a:rPr lang="en-US" b="1" dirty="0" err="1"/>
-                  <a:t>Mittelwert</a:t>
-                </a:r>
-                <a:r>
-                  <a:rPr lang="en-US" b="1" dirty="0"/>
-                  <a:t> (</a:t>
-                </a:r>
-                <a:r>
-                  <a:rPr lang="en-US" b="1" dirty="0" err="1"/>
-                  <a:t>arithmetisches</a:t>
-                </a:r>
-                <a:r>
-                  <a:rPr lang="en-US" b="1" dirty="0"/>
-                  <a:t> Mittel)</a:t>
-                </a:r>
-                <a:endParaRPr lang="en-US" dirty="0"/>
-              </a:p>
-              <a:p>
-                <a:r>
-                  <a:rPr lang="en-US" dirty="0"/>
-                  <a:t>Summe </a:t>
-                </a:r>
-                <a:r>
-                  <a:rPr lang="en-US" dirty="0" err="1"/>
-                  <a:t>aller</a:t>
-                </a:r>
-                <a:r>
-                  <a:rPr lang="en-US" dirty="0"/>
-                  <a:t> </a:t>
-                </a:r>
-                <a:r>
-                  <a:rPr lang="en-US" dirty="0" err="1"/>
-                  <a:t>Werte</a:t>
-                </a:r>
-                <a:r>
-                  <a:rPr lang="en-US" dirty="0"/>
-                  <a:t> ÷ </a:t>
-                </a:r>
-                <a:r>
-                  <a:rPr lang="en-US" dirty="0" err="1"/>
-                  <a:t>Anzahl</a:t>
-                </a:r>
-                <a:r>
-                  <a:rPr lang="en-US" dirty="0"/>
-                  <a:t> der </a:t>
-                </a:r>
-                <a:r>
-                  <a:rPr lang="en-US" dirty="0" err="1"/>
-                  <a:t>Werte</a:t>
-                </a:r>
-                <a:endParaRPr lang="en-US" dirty="0"/>
-              </a:p>
-              <a:p>
-                <a14:m>
-                  <m:oMathPara xmlns:m="http://schemas.openxmlformats.org/officeDocument/2006/math">
-                    <m:oMathParaPr>
-                      <m:jc m:val="centerGroup"/>
-                    </m:oMathParaPr>
-                    <m:oMath xmlns:m="http://schemas.openxmlformats.org/officeDocument/2006/math">
-                      <m:d>
-                        <m:dPr>
-                          <m:ctrlPr>
-                            <a:rPr lang="fa-IR"/>
-                          </m:ctrlPr>
-                        </m:dPr>
-                        <m:e>
-                          <m:r>
-                            <a:rPr lang="fa-IR"/>
-                            <m:t>2</m:t>
-                          </m:r>
-                          <m:r>
-                            <a:rPr lang="fa-IR"/>
-                            <m:t>+</m:t>
-                          </m:r>
-                          <m:r>
-                            <a:rPr lang="fa-IR"/>
-                            <m:t>4</m:t>
-                          </m:r>
-                          <m:r>
-                            <a:rPr lang="fa-IR"/>
-                            <m:t>+</m:t>
-                          </m:r>
-                          <m:r>
-                            <a:rPr lang="fa-IR"/>
-                            <m:t>4</m:t>
-                          </m:r>
-                          <m:r>
-                            <a:rPr lang="fa-IR"/>
-                            <m:t>+</m:t>
-                          </m:r>
-                          <m:r>
-                            <a:rPr lang="fa-IR"/>
-                            <m:t>6</m:t>
-                          </m:r>
-                          <m:r>
-                            <a:rPr lang="fa-IR"/>
-                            <m:t>+</m:t>
-                          </m:r>
-                          <m:r>
-                            <a:rPr lang="fa-IR"/>
-                            <m:t>8</m:t>
-                          </m:r>
-                        </m:e>
-                      </m:d>
-                      <m:r>
-                        <a:rPr lang="fa-IR"/>
-                        <m:t>/</m:t>
-                      </m:r>
-                      <m:r>
-                        <a:rPr lang="fa-IR"/>
-                        <m:t>5</m:t>
-                      </m:r>
-                      <m:r>
-                        <a:rPr lang="fa-IR"/>
-                        <m:t>=</m:t>
-                      </m:r>
-                      <m:r>
-                        <a:rPr lang="fa-IR"/>
-                        <m:t>4</m:t>
-                      </m:r>
-                      <m:r>
-                        <a:rPr lang="fa-IR"/>
-                        <m:t>,</m:t>
-                      </m:r>
-                      <m:r>
-                        <a:rPr lang="fa-IR"/>
-                        <m:t>8</m:t>
-                      </m:r>
-                    </m:oMath>
-                  </m:oMathPara>
-                </a14:m>
-                <a:endParaRPr lang="fa-IR" dirty="0"/>
-              </a:p>
-              <a:p>
-                <a:r>
-                  <a:rPr lang="fa-IR" dirty="0"/>
-                  <a:t>→ </a:t>
-                </a:r>
-                <a:r>
-                  <a:rPr lang="en-US" b="1" dirty="0" err="1"/>
-                  <a:t>Mittelwert</a:t>
-                </a:r>
-                <a:r>
-                  <a:rPr lang="en-US" b="1" dirty="0"/>
-                  <a:t> = 4,8</a:t>
-                </a:r>
-                <a:endParaRPr lang="en-US" dirty="0"/>
-              </a:p>
-              <a:p>
-                <a:r>
-                  <a:rPr lang="en-US" dirty="0" err="1"/>
-                  <a:t>Empfindlich</a:t>
-                </a:r>
-                <a:r>
-                  <a:rPr lang="en-US" dirty="0"/>
-                  <a:t> </a:t>
-                </a:r>
-                <a:r>
-                  <a:rPr lang="en-US" dirty="0" err="1"/>
-                  <a:t>gegenüber</a:t>
-                </a:r>
-                <a:r>
-                  <a:rPr lang="en-US" dirty="0"/>
-                  <a:t> </a:t>
-                </a:r>
-                <a:r>
-                  <a:rPr lang="en-US" dirty="0" err="1"/>
-                  <a:t>Ausreißern</a:t>
-                </a:r>
-                <a:endParaRPr lang="en-US" dirty="0"/>
-              </a:p>
-              <a:p>
-                <a:endParaRPr lang="en-US" dirty="0"/>
-              </a:p>
-              <a:p>
-                <a:endParaRPr lang="en-US" dirty="0"/>
-              </a:p>
-              <a:p>
-                <a:r>
-                  <a:rPr lang="de-DE" dirty="0"/>
-                  <a:t>daten = [10, 12, 11, 13, 12, 14, 100]  # 100 ist ein extremer Ausreißer</a:t>
-                </a:r>
-              </a:p>
-              <a:p>
-                <a:r>
-                  <a:rPr lang="de-DE" dirty="0" err="1"/>
-                  <a:t>mittelwert</a:t>
-                </a:r>
-                <a:r>
-                  <a:rPr lang="de-DE" dirty="0"/>
-                  <a:t> = </a:t>
-                </a:r>
-                <a:r>
-                  <a:rPr lang="de-DE" dirty="0" err="1"/>
-                  <a:t>sum</a:t>
-                </a:r>
-                <a:r>
-                  <a:rPr lang="de-DE" dirty="0"/>
-                  <a:t>(daten)/</a:t>
-                </a:r>
-                <a:r>
-                  <a:rPr lang="de-DE" dirty="0" err="1"/>
-                  <a:t>len</a:t>
-                </a:r>
-                <a:r>
-                  <a:rPr lang="de-DE" dirty="0"/>
-                  <a:t>(daten)      # Mittelwert = 24,57 → stark verzerrt</a:t>
-                </a:r>
-              </a:p>
-              <a:p>
-                <a:r>
-                  <a:rPr lang="de-DE" dirty="0"/>
-                  <a:t>bereinigt = [10, 12, 11, 13, 12, 14]</a:t>
-                </a:r>
-              </a:p>
-              <a:p>
-                <a:r>
-                  <a:rPr lang="de-DE" dirty="0" err="1"/>
-                  <a:t>mittelwert</a:t>
-                </a:r>
-                <a:r>
-                  <a:rPr lang="de-DE" dirty="0"/>
-                  <a:t> = </a:t>
-                </a:r>
-                <a:r>
-                  <a:rPr lang="de-DE" dirty="0" err="1"/>
-                  <a:t>sum</a:t>
-                </a:r>
-                <a:r>
-                  <a:rPr lang="de-DE" dirty="0"/>
-                  <a:t>(bereinigt)/</a:t>
-                </a:r>
-                <a:r>
-                  <a:rPr lang="de-DE" dirty="0" err="1"/>
-                  <a:t>len</a:t>
-                </a:r>
-                <a:r>
-                  <a:rPr lang="de-DE" dirty="0"/>
-                  <a:t>(bereinigt)  # Mittelwert = 12 → realistischer</a:t>
-                </a:r>
-                <a:endParaRPr lang="en-US" dirty="0"/>
-              </a:p>
-              <a:p>
-                <a:br>
-                  <a:rPr lang="en-US" dirty="0"/>
-                </a:br>
-                <a:endParaRPr lang="en-US" dirty="0"/>
-              </a:p>
-            </p:txBody>
-          </p:sp>
-        </mc:Choice>
-        <mc:Fallback>
-          <p:sp>
-            <p:nvSpPr>
-              <p:cNvPr id="11" name="TextBox 10">
-                <a:extLst>
-                  <a:ext uri="{FF2B5EF4-FFF2-40B4-BE49-F238E27FC236}">
-                    <a16:creationId xmlns:a16="http://schemas.microsoft.com/office/drawing/2014/main" id="{790F769F-68EB-9D5E-4C97-E3CA2CF3F8F5}"/>
-                  </a:ext>
-                </a:extLst>
-              </p:cNvPr>
-              <p:cNvSpPr txBox="1">
-                <a:spLocks noRot="1" noChangeAspect="1" noMove="1" noResize="1" noEditPoints="1" noAdjustHandles="1" noChangeArrowheads="1" noChangeShapeType="1" noTextEdit="1"/>
-              </p:cNvSpPr>
-              <p:nvPr/>
-            </p:nvSpPr>
-            <p:spPr>
-              <a:xfrm>
-                <a:off x="4245037" y="1272413"/>
-                <a:ext cx="7032629" cy="5503814"/>
-              </a:xfrm>
-              <a:prstGeom prst="rect">
-                <a:avLst/>
-              </a:prstGeom>
-              <a:blipFill>
-                <a:blip r:embed="rId5"/>
-                <a:stretch>
-                  <a:fillRect l="-780" t="-664"/>
-                </a:stretch>
-              </a:blipFill>
-            </p:spPr>
-            <p:txBody>
-              <a:bodyPr/>
-              <a:lstStyle/>
-              <a:p>
-                <a:r>
-                  <a:rPr lang="LID4096">
-                    <a:noFill/>
-                  </a:rPr>
-                  <a:t> </a:t>
-                </a:r>
-              </a:p>
-            </p:txBody>
-          </p:sp>
-        </mc:Fallback>
-      </mc:AlternateContent>
+      <p:pic>
+        <p:nvPicPr>
+          <p:cNvPr id="12" name="Picture 11">
+            <a:extLst>
+              <a:ext uri="{FF2B5EF4-FFF2-40B4-BE49-F238E27FC236}">
+                <a16:creationId xmlns:a16="http://schemas.microsoft.com/office/drawing/2014/main" id="{1687C0A3-1CFE-0049-82F3-171151CBAF75}"/>
+              </a:ext>
+            </a:extLst>
+          </p:cNvPr>
+          <p:cNvPicPr>
+            <a:picLocks noChangeAspect="1"/>
+          </p:cNvPicPr>
+          <p:nvPr/>
+        </p:nvPicPr>
+        <p:blipFill>
+          <a:blip r:embed="rId5">
+            <a:extLst>
+              <a:ext uri="{28A0092B-C50C-407E-A947-70E740481C1C}">
+                <a14:useLocalDpi xmlns:a14="http://schemas.microsoft.com/office/drawing/2010/main" val="0"/>
+              </a:ext>
+            </a:extLst>
+          </a:blip>
+          <a:stretch>
+            <a:fillRect/>
+          </a:stretch>
+        </p:blipFill>
+        <p:spPr>
+          <a:xfrm>
+            <a:off x="3678714" y="-140651"/>
+            <a:ext cx="6858000" cy="6858000"/>
+          </a:xfrm>
+          <a:prstGeom prst="rect">
+            <a:avLst/>
+          </a:prstGeom>
+        </p:spPr>
+      </p:pic>
     </p:spTree>
     <p:extLst>
       <p:ext uri="{BB962C8B-B14F-4D97-AF65-F5344CB8AC3E}">
-        <p14:creationId xmlns:p14="http://schemas.microsoft.com/office/powerpoint/2010/main" val="2988732126"/>
+        <p14:creationId xmlns:p14="http://schemas.microsoft.com/office/powerpoint/2010/main" val="2055639195"/>
       </p:ext>
     </p:extLst>
   </p:cSld>
@@ -10093,7 +8640,7 @@
         <p:cNvPr id="1" name="">
           <a:extLst>
             <a:ext uri="{FF2B5EF4-FFF2-40B4-BE49-F238E27FC236}">
-              <a16:creationId xmlns:a16="http://schemas.microsoft.com/office/drawing/2014/main" id="{F6DE97D6-D89A-8F38-C773-D7F79A45F70F}"/>
+              <a16:creationId xmlns:a16="http://schemas.microsoft.com/office/drawing/2014/main" id="{DE43C329-DDCF-8890-A9F7-7C577E730D46}"/>
             </a:ext>
           </a:extLst>
         </p:cNvPr>
@@ -10113,7 +8660,7 @@
           <p:cNvPr id="2" name="Rectangle: Rounded Corners 1">
             <a:extLst>
               <a:ext uri="{FF2B5EF4-FFF2-40B4-BE49-F238E27FC236}">
-                <a16:creationId xmlns:a16="http://schemas.microsoft.com/office/drawing/2014/main" id="{F26F7124-0357-2237-9B78-E4AF1C03D27E}"/>
+                <a16:creationId xmlns:a16="http://schemas.microsoft.com/office/drawing/2014/main" id="{368070A0-17D6-0D73-2BB7-64DC82213121}"/>
               </a:ext>
             </a:extLst>
           </p:cNvPr>
@@ -10165,7 +8712,7 @@
           <p:cNvPr id="3" name="Graphic 2" descr="Research">
             <a:extLst>
               <a:ext uri="{FF2B5EF4-FFF2-40B4-BE49-F238E27FC236}">
-                <a16:creationId xmlns:a16="http://schemas.microsoft.com/office/drawing/2014/main" id="{7D4A72CC-B92E-AD56-F5AA-8AD80789334E}"/>
+                <a16:creationId xmlns:a16="http://schemas.microsoft.com/office/drawing/2014/main" id="{5D1E209C-106A-36C3-60A1-61E8F3A21C24}"/>
               </a:ext>
             </a:extLst>
           </p:cNvPr>
@@ -10201,7 +8748,7 @@
           <p:cNvPr id="4" name="TextBox 3">
             <a:extLst>
               <a:ext uri="{FF2B5EF4-FFF2-40B4-BE49-F238E27FC236}">
-                <a16:creationId xmlns:a16="http://schemas.microsoft.com/office/drawing/2014/main" id="{5C434995-4B2D-53DB-507A-34C5CE635F9C}"/>
+                <a16:creationId xmlns:a16="http://schemas.microsoft.com/office/drawing/2014/main" id="{5A3A99EF-7D77-CD1E-474D-2DCC67FFC9B2}"/>
               </a:ext>
             </a:extLst>
           </p:cNvPr>
@@ -10267,220 +8814,82 @@
           </a:p>
         </p:txBody>
       </p:sp>
-      <p:sp>
-        <p:nvSpPr>
-          <p:cNvPr id="11" name="TextBox 10">
-            <a:extLst>
-              <a:ext uri="{FF2B5EF4-FFF2-40B4-BE49-F238E27FC236}">
-                <a16:creationId xmlns:a16="http://schemas.microsoft.com/office/drawing/2014/main" id="{115088DE-14B7-D50E-DEF5-9FB412E4E9AA}"/>
-              </a:ext>
-            </a:extLst>
-          </p:cNvPr>
-          <p:cNvSpPr txBox="1"/>
+      <p:pic>
+        <p:nvPicPr>
+          <p:cNvPr id="14" name="Picture 13">
+            <a:extLst>
+              <a:ext uri="{FF2B5EF4-FFF2-40B4-BE49-F238E27FC236}">
+                <a16:creationId xmlns:a16="http://schemas.microsoft.com/office/drawing/2014/main" id="{63200051-E317-5BA4-A4E6-6DB8E0959CEB}"/>
+              </a:ext>
+            </a:extLst>
+          </p:cNvPr>
+          <p:cNvPicPr>
+            <a:picLocks noChangeAspect="1"/>
+          </p:cNvPicPr>
           <p:nvPr/>
-        </p:nvSpPr>
+        </p:nvPicPr>
+        <p:blipFill>
+          <a:blip r:embed="rId5">
+            <a:extLst>
+              <a:ext uri="{28A0092B-C50C-407E-A947-70E740481C1C}">
+                <a14:useLocalDpi xmlns:a14="http://schemas.microsoft.com/office/drawing/2010/main" val="0"/>
+              </a:ext>
+            </a:extLst>
+          </a:blip>
+          <a:stretch>
+            <a:fillRect/>
+          </a:stretch>
+        </p:blipFill>
         <p:spPr>
           <a:xfrm>
-            <a:off x="4276299" y="1829724"/>
-            <a:ext cx="7032629" cy="4062651"/>
+            <a:off x="3760822" y="959249"/>
+            <a:ext cx="5340096" cy="5340096"/>
           </a:xfrm>
           <a:prstGeom prst="rect">
             <a:avLst/>
           </a:prstGeom>
-          <a:noFill/>
         </p:spPr>
-        <p:txBody>
-          <a:bodyPr wrap="square">
-            <a:spAutoFit/>
-          </a:bodyPr>
-          <a:lstStyle/>
-          <a:p>
-            <a:r>
-              <a:rPr lang="en-US" b="1" dirty="0" err="1"/>
-              <a:t>Lageparameter</a:t>
-            </a:r>
-            <a:r>
-              <a:rPr lang="en-US" b="1" dirty="0"/>
-              <a:t> (</a:t>
-            </a:r>
-            <a:r>
-              <a:rPr lang="en-US" b="1" dirty="0" err="1"/>
-              <a:t>Maße</a:t>
-            </a:r>
-            <a:r>
-              <a:rPr lang="en-US" b="1" dirty="0"/>
-              <a:t> der </a:t>
-            </a:r>
-            <a:r>
-              <a:rPr lang="en-US" b="1" dirty="0" err="1"/>
-              <a:t>zentralen</a:t>
-            </a:r>
-            <a:r>
-              <a:rPr lang="en-US" b="1" dirty="0"/>
-              <a:t> Tendenz)</a:t>
-            </a:r>
-          </a:p>
-          <a:p>
-            <a:r>
-              <a:rPr lang="en-US" b="1" dirty="0" err="1"/>
-              <a:t>Beispieldaten</a:t>
-            </a:r>
-            <a:r>
-              <a:rPr lang="en-US" b="1" dirty="0"/>
-              <a:t>:</a:t>
-            </a:r>
-            <a:r>
-              <a:rPr lang="en-US" dirty="0"/>
-              <a:t> 2, 4, 4, 6, 8</a:t>
-            </a:r>
-          </a:p>
-          <a:p>
-            <a:br>
-              <a:rPr lang="en-US" dirty="0"/>
-            </a:br>
-            <a:endParaRPr lang="en-US" dirty="0"/>
-          </a:p>
-          <a:p>
-            <a:r>
-              <a:rPr lang="en-US" b="1" dirty="0"/>
-              <a:t>Median (</a:t>
-            </a:r>
-            <a:r>
-              <a:rPr lang="en-US" b="1" dirty="0" err="1"/>
-              <a:t>Zentralwert</a:t>
-            </a:r>
-            <a:r>
-              <a:rPr lang="en-US" b="1" dirty="0"/>
-              <a:t>)</a:t>
-            </a:r>
-            <a:endParaRPr lang="en-US" dirty="0"/>
-          </a:p>
-          <a:p>
-            <a:r>
-              <a:rPr lang="en-US" dirty="0" err="1"/>
-              <a:t>Mittlerer</a:t>
-            </a:r>
-            <a:r>
-              <a:rPr lang="en-US" dirty="0"/>
-              <a:t> Wert der </a:t>
-            </a:r>
-            <a:r>
-              <a:rPr lang="en-US" dirty="0" err="1"/>
-              <a:t>sortierten</a:t>
-            </a:r>
-            <a:r>
-              <a:rPr lang="en-US" dirty="0"/>
-              <a:t> Daten</a:t>
-            </a:r>
-          </a:p>
-          <a:p>
-            <a:r>
-              <a:rPr lang="en-US" dirty="0" err="1"/>
-              <a:t>Sortiert</a:t>
-            </a:r>
-            <a:r>
-              <a:rPr lang="en-US" dirty="0"/>
-              <a:t>: 2, 4, </a:t>
-            </a:r>
-            <a:r>
-              <a:rPr lang="en-US" b="1" dirty="0"/>
-              <a:t>4</a:t>
-            </a:r>
-            <a:r>
-              <a:rPr lang="en-US" dirty="0"/>
-              <a:t>, 6, 8</a:t>
-            </a:r>
-          </a:p>
-          <a:p>
-            <a:r>
-              <a:rPr lang="en-US" dirty="0"/>
-              <a:t>→ </a:t>
-            </a:r>
-            <a:r>
-              <a:rPr lang="en-US" b="1" dirty="0"/>
-              <a:t>Median = 4</a:t>
-            </a:r>
-            <a:endParaRPr lang="en-US" dirty="0"/>
-          </a:p>
-          <a:p>
-            <a:r>
-              <a:rPr lang="en-US" dirty="0"/>
-              <a:t>Robust </a:t>
-            </a:r>
-            <a:r>
-              <a:rPr lang="en-US" dirty="0" err="1"/>
-              <a:t>gegenüber</a:t>
-            </a:r>
-            <a:r>
-              <a:rPr lang="en-US" dirty="0"/>
-              <a:t> </a:t>
-            </a:r>
-            <a:r>
-              <a:rPr lang="en-US" dirty="0" err="1"/>
-              <a:t>Ausreißern</a:t>
-            </a:r>
-            <a:endParaRPr lang="en-US" dirty="0"/>
-          </a:p>
-          <a:p>
-            <a:endParaRPr lang="en-US" dirty="0"/>
-          </a:p>
-          <a:p>
-            <a:r>
-              <a:rPr lang="en-US" dirty="0" err="1"/>
-              <a:t>Sortiert</a:t>
-            </a:r>
-            <a:r>
-              <a:rPr lang="en-US" dirty="0"/>
-              <a:t>: 2, 4, </a:t>
-            </a:r>
-            <a:r>
-              <a:rPr lang="en-US" sz="2400" b="1" dirty="0"/>
-              <a:t>4, 6</a:t>
-            </a:r>
-            <a:r>
-              <a:rPr lang="en-US" dirty="0"/>
-              <a:t>, 8, 100</a:t>
-            </a:r>
-          </a:p>
-          <a:p>
-            <a:r>
-              <a:rPr lang="en-US" dirty="0"/>
-              <a:t>→ </a:t>
-            </a:r>
-            <a:r>
-              <a:rPr lang="en-US" b="1" dirty="0"/>
-              <a:t>Median = (4+6)/2 = 5</a:t>
-            </a:r>
-            <a:endParaRPr lang="en-US" dirty="0"/>
-          </a:p>
-          <a:p>
-            <a:r>
-              <a:rPr lang="en-US" dirty="0"/>
-              <a:t>Robust </a:t>
-            </a:r>
-            <a:r>
-              <a:rPr lang="en-US" dirty="0" err="1"/>
-              <a:t>gegenüber</a:t>
-            </a:r>
-            <a:r>
-              <a:rPr lang="en-US" dirty="0"/>
-              <a:t> </a:t>
-            </a:r>
-            <a:r>
-              <a:rPr lang="en-US" dirty="0" err="1"/>
-              <a:t>Ausreißern</a:t>
-            </a:r>
-            <a:endParaRPr lang="en-US" dirty="0"/>
-          </a:p>
-          <a:p>
-            <a:endParaRPr lang="en-US" dirty="0"/>
-          </a:p>
-        </p:txBody>
-      </p:sp>
+      </p:pic>
+      <p:pic>
+        <p:nvPicPr>
+          <p:cNvPr id="5" name="Picture 4">
+            <a:extLst>
+              <a:ext uri="{FF2B5EF4-FFF2-40B4-BE49-F238E27FC236}">
+                <a16:creationId xmlns:a16="http://schemas.microsoft.com/office/drawing/2014/main" id="{9B223B21-650A-688F-7AC3-DD25654BBD3E}"/>
+              </a:ext>
+            </a:extLst>
+          </p:cNvPr>
+          <p:cNvPicPr>
+            <a:picLocks noChangeAspect="1"/>
+          </p:cNvPicPr>
+          <p:nvPr/>
+        </p:nvPicPr>
+        <p:blipFill>
+          <a:blip r:embed="rId6">
+            <a:extLst>
+              <a:ext uri="{28A0092B-C50C-407E-A947-70E740481C1C}">
+                <a14:useLocalDpi xmlns:a14="http://schemas.microsoft.com/office/drawing/2010/main" val="0"/>
+              </a:ext>
+            </a:extLst>
+          </a:blip>
+          <a:stretch>
+            <a:fillRect/>
+          </a:stretch>
+        </p:blipFill>
+        <p:spPr>
+          <a:xfrm>
+            <a:off x="9027677" y="2724528"/>
+            <a:ext cx="3033694" cy="2639314"/>
+          </a:xfrm>
+          <a:prstGeom prst="rect">
+            <a:avLst/>
+          </a:prstGeom>
+        </p:spPr>
+      </p:pic>
     </p:spTree>
     <p:extLst>
       <p:ext uri="{BB962C8B-B14F-4D97-AF65-F5344CB8AC3E}">
-        <p14:creationId xmlns:p14="http://schemas.microsoft.com/office/powerpoint/2010/main" val="1972382243"/>
+        <p14:creationId xmlns:p14="http://schemas.microsoft.com/office/powerpoint/2010/main" val="3820604449"/>
       </p:ext>
     </p:extLst>
   </p:cSld>
@@ -10498,7 +8907,7 @@
         <p:cNvPr id="1" name="">
           <a:extLst>
             <a:ext uri="{FF2B5EF4-FFF2-40B4-BE49-F238E27FC236}">
-              <a16:creationId xmlns:a16="http://schemas.microsoft.com/office/drawing/2014/main" id="{33803C23-898D-F704-5BDD-2CD402C2CF88}"/>
+              <a16:creationId xmlns:a16="http://schemas.microsoft.com/office/drawing/2014/main" id="{69A015A4-7611-9CB3-41E1-3B6E19E9639A}"/>
             </a:ext>
           </a:extLst>
         </p:cNvPr>
@@ -10518,7 +8927,7 @@
           <p:cNvPr id="2" name="Rectangle: Rounded Corners 1">
             <a:extLst>
               <a:ext uri="{FF2B5EF4-FFF2-40B4-BE49-F238E27FC236}">
-                <a16:creationId xmlns:a16="http://schemas.microsoft.com/office/drawing/2014/main" id="{34F6C127-2D48-AEC2-DB17-2290E29993BD}"/>
+                <a16:creationId xmlns:a16="http://schemas.microsoft.com/office/drawing/2014/main" id="{F72B7DF8-52DC-DEB1-4709-710B34A61781}"/>
               </a:ext>
             </a:extLst>
           </p:cNvPr>
@@ -10570,7 +8979,7 @@
           <p:cNvPr id="3" name="Graphic 2" descr="Research">
             <a:extLst>
               <a:ext uri="{FF2B5EF4-FFF2-40B4-BE49-F238E27FC236}">
-                <a16:creationId xmlns:a16="http://schemas.microsoft.com/office/drawing/2014/main" id="{45EC3A64-71A8-A608-D610-CBC66D04F12B}"/>
+                <a16:creationId xmlns:a16="http://schemas.microsoft.com/office/drawing/2014/main" id="{FDC337D9-4C60-5B07-0B6D-94C0BF23F4A8}"/>
               </a:ext>
             </a:extLst>
           </p:cNvPr>
@@ -10606,7 +9015,7 @@
           <p:cNvPr id="4" name="TextBox 3">
             <a:extLst>
               <a:ext uri="{FF2B5EF4-FFF2-40B4-BE49-F238E27FC236}">
-                <a16:creationId xmlns:a16="http://schemas.microsoft.com/office/drawing/2014/main" id="{B1584D58-C06C-68FF-7FEF-EB2A64CC76E8}"/>
+                <a16:creationId xmlns:a16="http://schemas.microsoft.com/office/drawing/2014/main" id="{E2ED07A7-268B-F4F8-B87B-35F247CFE5B6}"/>
               </a:ext>
             </a:extLst>
           </p:cNvPr>
@@ -10672,160 +9081,46 @@
           </a:p>
         </p:txBody>
       </p:sp>
-      <p:sp>
-        <p:nvSpPr>
-          <p:cNvPr id="11" name="TextBox 10">
-            <a:extLst>
-              <a:ext uri="{FF2B5EF4-FFF2-40B4-BE49-F238E27FC236}">
-                <a16:creationId xmlns:a16="http://schemas.microsoft.com/office/drawing/2014/main" id="{56EFB669-7032-2B7B-9BB2-4DD9912D778C}"/>
-              </a:ext>
-            </a:extLst>
-          </p:cNvPr>
-          <p:cNvSpPr txBox="1"/>
+      <p:pic>
+        <p:nvPicPr>
+          <p:cNvPr id="16" name="Picture 15">
+            <a:extLst>
+              <a:ext uri="{FF2B5EF4-FFF2-40B4-BE49-F238E27FC236}">
+                <a16:creationId xmlns:a16="http://schemas.microsoft.com/office/drawing/2014/main" id="{B3323A4D-4981-F98B-6A60-7B6A574F3464}"/>
+              </a:ext>
+            </a:extLst>
+          </p:cNvPr>
+          <p:cNvPicPr>
+            <a:picLocks noChangeAspect="1"/>
+          </p:cNvPicPr>
           <p:nvPr/>
-        </p:nvSpPr>
+        </p:nvPicPr>
+        <p:blipFill>
+          <a:blip r:embed="rId5">
+            <a:extLst>
+              <a:ext uri="{28A0092B-C50C-407E-A947-70E740481C1C}">
+                <a14:useLocalDpi xmlns:a14="http://schemas.microsoft.com/office/drawing/2010/main" val="0"/>
+              </a:ext>
+            </a:extLst>
+          </a:blip>
+          <a:stretch>
+            <a:fillRect/>
+          </a:stretch>
+        </p:blipFill>
         <p:spPr>
           <a:xfrm>
-            <a:off x="4276299" y="1829724"/>
-            <a:ext cx="7032629" cy="2862322"/>
+            <a:off x="3341567" y="0"/>
+            <a:ext cx="6858000" cy="6858000"/>
           </a:xfrm>
           <a:prstGeom prst="rect">
             <a:avLst/>
           </a:prstGeom>
-          <a:noFill/>
         </p:spPr>
-        <p:txBody>
-          <a:bodyPr wrap="square">
-            <a:spAutoFit/>
-          </a:bodyPr>
-          <a:lstStyle/>
-          <a:p>
-            <a:r>
-              <a:rPr lang="de-DE" b="1" dirty="0"/>
-              <a:t>Modus (Modalwert)</a:t>
-            </a:r>
-          </a:p>
-          <a:p>
-            <a:r>
-              <a:rPr lang="de-DE" dirty="0"/>
-              <a:t>Wert mit höchster Häufigkeit</a:t>
-            </a:r>
-          </a:p>
-          <a:p>
-            <a:endParaRPr lang="de-DE" b="1" dirty="0"/>
-          </a:p>
-          <a:p>
-            <a:r>
-              <a:rPr lang="de-DE" b="1" dirty="0"/>
-              <a:t>Beispiel: [2, 4, 4, 6, 8] </a:t>
-            </a:r>
-          </a:p>
-          <a:p>
-            <a:r>
-              <a:rPr lang="de-DE" b="1" dirty="0"/>
-              <a:t>Modus = 4</a:t>
-            </a:r>
-          </a:p>
-          <a:p>
-            <a:endParaRPr lang="de-DE" b="1" dirty="0"/>
-          </a:p>
-          <a:p>
-            <a:endParaRPr lang="de-DE" b="1" dirty="0"/>
-          </a:p>
-          <a:p>
-            <a:endParaRPr lang="de-DE" b="1" dirty="0"/>
-          </a:p>
-          <a:p>
-            <a:r>
-              <a:rPr lang="de-DE" b="1" dirty="0"/>
-              <a:t>Beispiel:  [“</a:t>
-            </a:r>
-            <a:r>
-              <a:rPr lang="de-DE" b="1" dirty="0" err="1"/>
-              <a:t>apple</a:t>
-            </a:r>
-            <a:r>
-              <a:rPr lang="de-DE" b="1" dirty="0"/>
-              <a:t>“,“orange“,“</a:t>
-            </a:r>
-            <a:r>
-              <a:rPr lang="de-DE" b="1" dirty="0" err="1"/>
-              <a:t>banana</a:t>
-            </a:r>
-            <a:r>
-              <a:rPr lang="de-DE" b="1" dirty="0"/>
-              <a:t>“,“</a:t>
-            </a:r>
-            <a:r>
-              <a:rPr lang="de-DE" b="1" dirty="0" err="1"/>
-              <a:t>apple</a:t>
-            </a:r>
-            <a:r>
-              <a:rPr lang="de-DE" b="1" dirty="0"/>
-              <a:t>“,“</a:t>
-            </a:r>
-            <a:r>
-              <a:rPr lang="de-DE" b="1" dirty="0" err="1"/>
-              <a:t>apple</a:t>
-            </a:r>
-            <a:r>
-              <a:rPr lang="de-DE" b="1" dirty="0"/>
-              <a:t>“]</a:t>
-            </a:r>
-          </a:p>
-          <a:p>
-            <a:r>
-              <a:rPr lang="de-DE" b="1" dirty="0"/>
-              <a:t>Apple : 3   </a:t>
-            </a:r>
-            <a:r>
-              <a:rPr lang="de-DE" b="1" dirty="0" err="1"/>
-              <a:t>modus</a:t>
-            </a:r>
-            <a:endParaRPr lang="de-DE" b="1" dirty="0"/>
-          </a:p>
-        </p:txBody>
-      </p:sp>
-      <p:sp>
-        <p:nvSpPr>
-          <p:cNvPr id="6" name="TextBox 5">
-            <a:extLst>
-              <a:ext uri="{FF2B5EF4-FFF2-40B4-BE49-F238E27FC236}">
-                <a16:creationId xmlns:a16="http://schemas.microsoft.com/office/drawing/2014/main" id="{083DCA11-5874-7230-8926-54ACCF119769}"/>
-              </a:ext>
-            </a:extLst>
-          </p:cNvPr>
-          <p:cNvSpPr txBox="1"/>
-          <p:nvPr/>
-        </p:nvSpPr>
-        <p:spPr>
-          <a:xfrm>
-            <a:off x="4276299" y="5349860"/>
-            <a:ext cx="6096000" cy="369332"/>
-          </a:xfrm>
-          <a:prstGeom prst="rect">
-            <a:avLst/>
-          </a:prstGeom>
-          <a:noFill/>
-        </p:spPr>
-        <p:txBody>
-          <a:bodyPr wrap="square">
-            <a:spAutoFit/>
-          </a:bodyPr>
-          <a:lstStyle/>
-          <a:p>
-            <a:r>
-              <a:rPr lang="de-DE" b="1" dirty="0"/>
-              <a:t>Kategoriale Daten und numerische Daten</a:t>
-            </a:r>
-            <a:endParaRPr lang="LID4096" b="1" dirty="0"/>
-          </a:p>
-        </p:txBody>
-      </p:sp>
+      </p:pic>
     </p:spTree>
     <p:extLst>
       <p:ext uri="{BB962C8B-B14F-4D97-AF65-F5344CB8AC3E}">
-        <p14:creationId xmlns:p14="http://schemas.microsoft.com/office/powerpoint/2010/main" val="1605770075"/>
+        <p14:creationId xmlns:p14="http://schemas.microsoft.com/office/powerpoint/2010/main" val="211549844"/>
       </p:ext>
     </p:extLst>
   </p:cSld>
